--- a/presentations/PR_L13_SQLQueries_Lesson.pptx
+++ b/presentations/PR_L13_SQLQueries_Lesson.pptx
@@ -2167,7 +2167,7 @@
                 <a:ea typeface="IBM Plex Sans" pitchFamily="34" charset="-122"/>
                 <a:cs typeface="IBM Plex Sans" pitchFamily="34" charset="-120"/>
               </a:rPr>
-              <a:t>A database holds far more than a program could ever keep in memory, and SQL is how you ask it a question. At the query desk you will write queries against a table of games.</a:t>
+              <a:t>A database holds far more than a program could ever keep in memory, and SQL is how you ask it a question. Work through the six stations and you will write queries against a table called games, choosing the columns you want, keeping only the rows you want and putting them in order.</a:t>
             </a:r>
             <a:endParaRPr lang="en-US" sz="1800" dirty="0"/>
           </a:p>
@@ -2805,7 +2805,7 @@
                 <a:ea typeface="IBM Plex Sans" pitchFamily="34" charset="-122"/>
                 <a:cs typeface="IBM Plex Sans" pitchFamily="34" charset="-120"/>
               </a:rPr>
-              <a:t>One line of SQL can do the work of a loop, an if statement and a sort put together.</a:t>
+              <a:t>One query can filter and sort at once, which is why that work belongs in the query and not in...</a:t>
             </a:r>
             <a:endParaRPr lang="en-US" sz="1600" dirty="0"/>
           </a:p>
@@ -5922,7 +5922,7 @@
                 <a:ea typeface="IBM Plex Sans" pitchFamily="34" charset="-122"/>
                 <a:cs typeface="IBM Plex Sans" pitchFamily="34" charset="-120"/>
               </a:rPr>
-              <a:t>Know how to join conditions with AND and OR, and how to sort results with ORDER BY</a:t>
+              <a:t>Know how to join conditions with AND and OR, and how to put results in order with ORDER BY</a:t>
             </a:r>
             <a:endParaRPr lang="en-US" sz="1900" dirty="0"/>
           </a:p>
@@ -8159,7 +8159,7 @@
                 <a:ea typeface="IBM Plex Sans" pitchFamily="34" charset="-122"/>
                 <a:cs typeface="IBM Plex Sans" pitchFamily="34" charset="-120"/>
               </a:rPr>
-              <a:t>SQL stands for Structured Query Language, and it is a language for asking rather than for programming.</a:t>
+              <a:t>SQL stands for Structured Query Language, and what it is for is asking rather than...</a:t>
             </a:r>
             <a:endParaRPr lang="en-US" sz="1600" dirty="0"/>
           </a:p>
@@ -8735,7 +8735,7 @@
                 <a:ea typeface="IBM Plex Sans" pitchFamily="34" charset="-122"/>
                 <a:cs typeface="IBM Plex Sans" pitchFamily="34" charset="-120"/>
               </a:rPr>
-              <a:t>WHERE looks at each record on its own and decides whether to keep it or drop it.</a:t>
+              <a:t>WHERE looks at each record on its own and decides, for that one record, whether to...</a:t>
             </a:r>
             <a:endParaRPr lang="en-US" sz="1600" dirty="0"/>
           </a:p>
@@ -9311,7 +9311,7 @@
                 <a:ea typeface="IBM Plex Sans" pitchFamily="34" charset="-122"/>
                 <a:cs typeface="IBM Plex Sans" pitchFamily="34" charset="-120"/>
               </a:rPr>
-              <a:t>SQL writes 'not equal to' as &lt;&gt;, where Python writes it as !=.</a:t>
+              <a:t>SQL writes 'not equal to' as &lt;&gt;, where the same test in Python is written...</a:t>
             </a:r>
             <a:endParaRPr lang="en-US" sz="1600" dirty="0"/>
           </a:p>
@@ -9887,7 +9887,7 @@
                 <a:ea typeface="IBM Plex Sans" pitchFamily="34" charset="-122"/>
                 <a:cs typeface="IBM Plex Sans" pitchFamily="34" charset="-120"/>
               </a:rPr>
-              <a:t>AND narrows the results down and OR widens them out, which is worth saying out loud as you write.</a:t>
+              <a:t>AND narrows the records down while OR widens them out, so the one that can only ever give you fewer records is...</a:t>
             </a:r>
             <a:endParaRPr lang="en-US" sz="1600" dirty="0"/>
           </a:p>
@@ -10463,7 +10463,7 @@
                 <a:ea typeface="IBM Plex Sans" pitchFamily="34" charset="-122"/>
                 <a:cs typeface="IBM Plex Sans" pitchFamily="34" charset="-120"/>
               </a:rPr>
-              <a:t>Ascending is the default order, which SQL calls ASC, so it is almost never typed out.</a:t>
+              <a:t>Ascending is the order ORDER BY uses unless you say otherwise, and the word that asks for the other direction is...</a:t>
             </a:r>
             <a:endParaRPr lang="en-US" sz="1600" dirty="0"/>
           </a:p>

--- a/presentations/PR_L13_SQLQueries_Lesson.pptx
+++ b/presentations/PR_L13_SQLQueries_Lesson.pptx
@@ -4060,7 +4060,381 @@
                 <a:ea typeface="IBM Plex Sans" pitchFamily="34" charset="-122"/>
                 <a:cs typeface="IBM Plex Sans" pitchFamily="34" charset="-120"/>
               </a:rPr>
-              <a:t>A query is written SELECT Title FROM Game ORDER BY Length WHERE Players = 2. State the error in it, and write the query out corrected.</a:t>
+              <a:t>A query is written </a:t>
+            </a:r>
+            <a:pPr indent="0" marL="0">
+              <a:lnSpc>
+                <a:spcPct val="118000"/>
+              </a:lnSpc>
+              <a:buNone/>
+            </a:pPr>
+            <a:r>
+              <a:rPr lang="en-US" sz="1700" dirty="0">
+                <a:solidFill>
+                  <a:srgbClr val="18181B"/>
+                </a:solidFill>
+                <a:latin typeface="IBM Plex Mono" pitchFamily="34" charset="0"/>
+                <a:ea typeface="IBM Plex Mono" pitchFamily="34" charset="-122"/>
+                <a:cs typeface="IBM Plex Mono" pitchFamily="34" charset="-120"/>
+              </a:rPr>
+              <a:t>SELECT</a:t>
+            </a:r>
+            <a:pPr indent="0" marL="0">
+              <a:lnSpc>
+                <a:spcPct val="118000"/>
+              </a:lnSpc>
+              <a:buNone/>
+            </a:pPr>
+            <a:r>
+              <a:rPr lang="en-US" sz="1700" dirty="0">
+                <a:solidFill>
+                  <a:srgbClr val="18181B"/>
+                </a:solidFill>
+                <a:latin typeface="IBM Plex Mono" pitchFamily="34" charset="0"/>
+                <a:ea typeface="IBM Plex Mono" pitchFamily="34" charset="-122"/>
+                <a:cs typeface="IBM Plex Mono" pitchFamily="34" charset="-120"/>
+              </a:rPr>
+              <a:t> </a:t>
+            </a:r>
+            <a:pPr indent="0" marL="0">
+              <a:lnSpc>
+                <a:spcPct val="118000"/>
+              </a:lnSpc>
+              <a:buNone/>
+            </a:pPr>
+            <a:r>
+              <a:rPr lang="en-US" sz="1700" dirty="0">
+                <a:solidFill>
+                  <a:srgbClr val="18181B"/>
+                </a:solidFill>
+                <a:latin typeface="IBM Plex Mono" pitchFamily="34" charset="0"/>
+                <a:ea typeface="IBM Plex Mono" pitchFamily="34" charset="-122"/>
+                <a:cs typeface="IBM Plex Mono" pitchFamily="34" charset="-120"/>
+              </a:rPr>
+              <a:t>Title</a:t>
+            </a:r>
+            <a:pPr indent="0" marL="0">
+              <a:lnSpc>
+                <a:spcPct val="118000"/>
+              </a:lnSpc>
+              <a:buNone/>
+            </a:pPr>
+            <a:r>
+              <a:rPr lang="en-US" sz="1700" dirty="0">
+                <a:solidFill>
+                  <a:srgbClr val="18181B"/>
+                </a:solidFill>
+                <a:latin typeface="IBM Plex Mono" pitchFamily="34" charset="0"/>
+                <a:ea typeface="IBM Plex Mono" pitchFamily="34" charset="-122"/>
+                <a:cs typeface="IBM Plex Mono" pitchFamily="34" charset="-120"/>
+              </a:rPr>
+              <a:t> </a:t>
+            </a:r>
+            <a:pPr indent="0" marL="0">
+              <a:lnSpc>
+                <a:spcPct val="118000"/>
+              </a:lnSpc>
+              <a:buNone/>
+            </a:pPr>
+            <a:r>
+              <a:rPr lang="en-US" sz="1700" dirty="0">
+                <a:solidFill>
+                  <a:srgbClr val="18181B"/>
+                </a:solidFill>
+                <a:latin typeface="IBM Plex Mono" pitchFamily="34" charset="0"/>
+                <a:ea typeface="IBM Plex Mono" pitchFamily="34" charset="-122"/>
+                <a:cs typeface="IBM Plex Mono" pitchFamily="34" charset="-120"/>
+              </a:rPr>
+              <a:t>FROM</a:t>
+            </a:r>
+            <a:pPr indent="0" marL="0">
+              <a:lnSpc>
+                <a:spcPct val="118000"/>
+              </a:lnSpc>
+              <a:buNone/>
+            </a:pPr>
+            <a:r>
+              <a:rPr lang="en-US" sz="1700" dirty="0">
+                <a:solidFill>
+                  <a:srgbClr val="18181B"/>
+                </a:solidFill>
+                <a:latin typeface="IBM Plex Mono" pitchFamily="34" charset="0"/>
+                <a:ea typeface="IBM Plex Mono" pitchFamily="34" charset="-122"/>
+                <a:cs typeface="IBM Plex Mono" pitchFamily="34" charset="-120"/>
+              </a:rPr>
+              <a:t> </a:t>
+            </a:r>
+            <a:pPr indent="0" marL="0">
+              <a:lnSpc>
+                <a:spcPct val="118000"/>
+              </a:lnSpc>
+              <a:buNone/>
+            </a:pPr>
+            <a:r>
+              <a:rPr lang="en-US" sz="1700" dirty="0">
+                <a:solidFill>
+                  <a:srgbClr val="18181B"/>
+                </a:solidFill>
+                <a:latin typeface="IBM Plex Mono" pitchFamily="34" charset="0"/>
+                <a:ea typeface="IBM Plex Mono" pitchFamily="34" charset="-122"/>
+                <a:cs typeface="IBM Plex Mono" pitchFamily="34" charset="-120"/>
+              </a:rPr>
+              <a:t>Game</a:t>
+            </a:r>
+            <a:pPr indent="0" marL="0">
+              <a:lnSpc>
+                <a:spcPct val="118000"/>
+              </a:lnSpc>
+              <a:buNone/>
+            </a:pPr>
+            <a:r>
+              <a:rPr lang="en-US" sz="1700" dirty="0">
+                <a:solidFill>
+                  <a:srgbClr val="18181B"/>
+                </a:solidFill>
+                <a:latin typeface="IBM Plex Mono" pitchFamily="34" charset="0"/>
+                <a:ea typeface="IBM Plex Mono" pitchFamily="34" charset="-122"/>
+                <a:cs typeface="IBM Plex Mono" pitchFamily="34" charset="-120"/>
+              </a:rPr>
+              <a:t> </a:t>
+            </a:r>
+            <a:pPr indent="0" marL="0">
+              <a:lnSpc>
+                <a:spcPct val="118000"/>
+              </a:lnSpc>
+              <a:buNone/>
+            </a:pPr>
+            <a:r>
+              <a:rPr lang="en-US" sz="1700" dirty="0">
+                <a:solidFill>
+                  <a:srgbClr val="18181B"/>
+                </a:solidFill>
+                <a:latin typeface="IBM Plex Mono" pitchFamily="34" charset="0"/>
+                <a:ea typeface="IBM Plex Mono" pitchFamily="34" charset="-122"/>
+                <a:cs typeface="IBM Plex Mono" pitchFamily="34" charset="-120"/>
+              </a:rPr>
+              <a:t>ORDER</a:t>
+            </a:r>
+            <a:pPr indent="0" marL="0">
+              <a:lnSpc>
+                <a:spcPct val="118000"/>
+              </a:lnSpc>
+              <a:buNone/>
+            </a:pPr>
+            <a:r>
+              <a:rPr lang="en-US" sz="1700" dirty="0">
+                <a:solidFill>
+                  <a:srgbClr val="18181B"/>
+                </a:solidFill>
+                <a:latin typeface="IBM Plex Mono" pitchFamily="34" charset="0"/>
+                <a:ea typeface="IBM Plex Mono" pitchFamily="34" charset="-122"/>
+                <a:cs typeface="IBM Plex Mono" pitchFamily="34" charset="-120"/>
+              </a:rPr>
+              <a:t> </a:t>
+            </a:r>
+            <a:pPr indent="0" marL="0">
+              <a:lnSpc>
+                <a:spcPct val="118000"/>
+              </a:lnSpc>
+              <a:buNone/>
+            </a:pPr>
+            <a:r>
+              <a:rPr lang="en-US" sz="1700" dirty="0">
+                <a:solidFill>
+                  <a:srgbClr val="18181B"/>
+                </a:solidFill>
+                <a:latin typeface="IBM Plex Mono" pitchFamily="34" charset="0"/>
+                <a:ea typeface="IBM Plex Mono" pitchFamily="34" charset="-122"/>
+                <a:cs typeface="IBM Plex Mono" pitchFamily="34" charset="-120"/>
+              </a:rPr>
+              <a:t>BY</a:t>
+            </a:r>
+            <a:pPr indent="0" marL="0">
+              <a:lnSpc>
+                <a:spcPct val="118000"/>
+              </a:lnSpc>
+              <a:buNone/>
+            </a:pPr>
+            <a:r>
+              <a:rPr lang="en-US" sz="1700" dirty="0">
+                <a:solidFill>
+                  <a:srgbClr val="18181B"/>
+                </a:solidFill>
+                <a:latin typeface="IBM Plex Mono" pitchFamily="34" charset="0"/>
+                <a:ea typeface="IBM Plex Mono" pitchFamily="34" charset="-122"/>
+                <a:cs typeface="IBM Plex Mono" pitchFamily="34" charset="-120"/>
+              </a:rPr>
+              <a:t> </a:t>
+            </a:r>
+            <a:pPr indent="0" marL="0">
+              <a:lnSpc>
+                <a:spcPct val="118000"/>
+              </a:lnSpc>
+              <a:buNone/>
+            </a:pPr>
+            <a:r>
+              <a:rPr lang="en-US" sz="1700" dirty="0">
+                <a:solidFill>
+                  <a:srgbClr val="18181B"/>
+                </a:solidFill>
+                <a:latin typeface="IBM Plex Mono" pitchFamily="34" charset="0"/>
+                <a:ea typeface="IBM Plex Mono" pitchFamily="34" charset="-122"/>
+                <a:cs typeface="IBM Plex Mono" pitchFamily="34" charset="-120"/>
+              </a:rPr>
+              <a:t>Length</a:t>
+            </a:r>
+            <a:pPr indent="0" marL="0">
+              <a:lnSpc>
+                <a:spcPct val="118000"/>
+              </a:lnSpc>
+              <a:buNone/>
+            </a:pPr>
+            <a:r>
+              <a:rPr lang="en-US" sz="1700" dirty="0">
+                <a:solidFill>
+                  <a:srgbClr val="18181B"/>
+                </a:solidFill>
+                <a:latin typeface="IBM Plex Mono" pitchFamily="34" charset="0"/>
+                <a:ea typeface="IBM Plex Mono" pitchFamily="34" charset="-122"/>
+                <a:cs typeface="IBM Plex Mono" pitchFamily="34" charset="-120"/>
+              </a:rPr>
+              <a:t> </a:t>
+            </a:r>
+            <a:pPr indent="0" marL="0">
+              <a:lnSpc>
+                <a:spcPct val="118000"/>
+              </a:lnSpc>
+              <a:buNone/>
+            </a:pPr>
+            <a:r>
+              <a:rPr lang="en-US" sz="1700" dirty="0">
+                <a:solidFill>
+                  <a:srgbClr val="18181B"/>
+                </a:solidFill>
+                <a:latin typeface="IBM Plex Mono" pitchFamily="34" charset="0"/>
+                <a:ea typeface="IBM Plex Mono" pitchFamily="34" charset="-122"/>
+                <a:cs typeface="IBM Plex Mono" pitchFamily="34" charset="-120"/>
+              </a:rPr>
+              <a:t>WHERE</a:t>
+            </a:r>
+            <a:pPr indent="0" marL="0">
+              <a:lnSpc>
+                <a:spcPct val="118000"/>
+              </a:lnSpc>
+              <a:buNone/>
+            </a:pPr>
+            <a:r>
+              <a:rPr lang="en-US" sz="1700" dirty="0">
+                <a:solidFill>
+                  <a:srgbClr val="18181B"/>
+                </a:solidFill>
+                <a:latin typeface="IBM Plex Mono" pitchFamily="34" charset="0"/>
+                <a:ea typeface="IBM Plex Mono" pitchFamily="34" charset="-122"/>
+                <a:cs typeface="IBM Plex Mono" pitchFamily="34" charset="-120"/>
+              </a:rPr>
+              <a:t> </a:t>
+            </a:r>
+            <a:pPr indent="0" marL="0">
+              <a:lnSpc>
+                <a:spcPct val="118000"/>
+              </a:lnSpc>
+              <a:buNone/>
+            </a:pPr>
+            <a:r>
+              <a:rPr lang="en-US" sz="1700" dirty="0">
+                <a:solidFill>
+                  <a:srgbClr val="18181B"/>
+                </a:solidFill>
+                <a:latin typeface="IBM Plex Mono" pitchFamily="34" charset="0"/>
+                <a:ea typeface="IBM Plex Mono" pitchFamily="34" charset="-122"/>
+                <a:cs typeface="IBM Plex Mono" pitchFamily="34" charset="-120"/>
+              </a:rPr>
+              <a:t>Players</a:t>
+            </a:r>
+            <a:pPr indent="0" marL="0">
+              <a:lnSpc>
+                <a:spcPct val="118000"/>
+              </a:lnSpc>
+              <a:buNone/>
+            </a:pPr>
+            <a:r>
+              <a:rPr lang="en-US" sz="1700" dirty="0">
+                <a:solidFill>
+                  <a:srgbClr val="18181B"/>
+                </a:solidFill>
+                <a:latin typeface="IBM Plex Mono" pitchFamily="34" charset="0"/>
+                <a:ea typeface="IBM Plex Mono" pitchFamily="34" charset="-122"/>
+                <a:cs typeface="IBM Plex Mono" pitchFamily="34" charset="-120"/>
+              </a:rPr>
+              <a:t> </a:t>
+            </a:r>
+            <a:pPr indent="0" marL="0">
+              <a:lnSpc>
+                <a:spcPct val="118000"/>
+              </a:lnSpc>
+              <a:buNone/>
+            </a:pPr>
+            <a:r>
+              <a:rPr lang="en-US" sz="1700" dirty="0">
+                <a:solidFill>
+                  <a:srgbClr val="3F3F46"/>
+                </a:solidFill>
+                <a:latin typeface="IBM Plex Mono" pitchFamily="34" charset="0"/>
+                <a:ea typeface="IBM Plex Mono" pitchFamily="34" charset="-122"/>
+                <a:cs typeface="IBM Plex Mono" pitchFamily="34" charset="-120"/>
+              </a:rPr>
+              <a:t>=</a:t>
+            </a:r>
+            <a:pPr indent="0" marL="0">
+              <a:lnSpc>
+                <a:spcPct val="118000"/>
+              </a:lnSpc>
+              <a:buNone/>
+            </a:pPr>
+            <a:r>
+              <a:rPr lang="en-US" sz="1700" dirty="0">
+                <a:solidFill>
+                  <a:srgbClr val="18181B"/>
+                </a:solidFill>
+                <a:latin typeface="IBM Plex Mono" pitchFamily="34" charset="0"/>
+                <a:ea typeface="IBM Plex Mono" pitchFamily="34" charset="-122"/>
+                <a:cs typeface="IBM Plex Mono" pitchFamily="34" charset="-120"/>
+              </a:rPr>
+              <a:t> </a:t>
+            </a:r>
+            <a:pPr indent="0" marL="0">
+              <a:lnSpc>
+                <a:spcPct val="118000"/>
+              </a:lnSpc>
+              <a:buNone/>
+            </a:pPr>
+            <a:r>
+              <a:rPr lang="en-US" sz="1700" dirty="0">
+                <a:solidFill>
+                  <a:srgbClr val="9A3412"/>
+                </a:solidFill>
+                <a:latin typeface="IBM Plex Mono" pitchFamily="34" charset="0"/>
+                <a:ea typeface="IBM Plex Mono" pitchFamily="34" charset="-122"/>
+                <a:cs typeface="IBM Plex Mono" pitchFamily="34" charset="-120"/>
+              </a:rPr>
+              <a:t>2</a:t>
+            </a:r>
+            <a:pPr indent="0" marL="0">
+              <a:lnSpc>
+                <a:spcPct val="118000"/>
+              </a:lnSpc>
+              <a:buNone/>
+            </a:pPr>
+            <a:r>
+              <a:rPr lang="en-US" sz="1700" dirty="0">
+                <a:solidFill>
+                  <a:srgbClr val="101828"/>
+                </a:solidFill>
+                <a:latin typeface="IBM Plex Sans" pitchFamily="34" charset="0"/>
+                <a:ea typeface="IBM Plex Sans" pitchFamily="34" charset="-122"/>
+                <a:cs typeface="IBM Plex Sans" pitchFamily="34" charset="-120"/>
+              </a:rPr>
+              <a:t>. State the error in it, and write the query out corrected.</a:t>
             </a:r>
             <a:endParaRPr lang="en-US" sz="1700" dirty="0"/>
           </a:p>

--- a/presentations/PR_L13_SQLQueries_Lesson.pptx
+++ b/presentations/PR_L13_SQLQueries_Lesson.pptx
@@ -19,9 +19,10 @@
     <p:sldId id="267" r:id="rId13"/>
     <p:sldId id="268" r:id="rId14"/>
     <p:sldId id="269" r:id="rId15"/>
+    <p:sldId id="270" r:id="rId16"/>
   </p:sldIdLst>
   <p:notesMasterIdLst>
-    <p:notesMasterId r:id="rId16"/>
+    <p:notesMasterId r:id="rId17"/>
   </p:notesMasterIdLst>
   <p:sldSz cx="12192000" cy="6858000"/>
   <p:notesSz cx="6858000" cy="12192000"/>
@@ -692,7 +693,16 @@
           <a:p>
             <a:r>
               <a:rPr lang="en-US" dirty="0"/>
-              <a:t>Make them commit to an answer on paper before they tap the star. Guessing first costs them the learning.</a:t>
+              <a:t>The answer is B: Willow Gate
+---
+Clay Pigeon
+Willow Gate.
+Do not say it yet. Every pupil commits first - fingers, whiteboards or a show of hands on each letter in turn - and you count the split before anyone can change their mind.
+IF MOST OF THE CLASS IS RIGHT: say why it is right in one sentence and go straight on to the independent work.
+IF A SIGNIFICANT GROUP IS ON ONE WRONG LETTER: that option is the misconception to teach against before anyone goes on. Go back to station 3, Comparing values, and work through its example again, aloud, with the class watching, then re-ask this question.
+The course's own response to a wrong answer here: &gt; leaves the boundary value out and &gt;= lets it in. The row sitting exactly on the number is the only one that can tell the two apart.
+A limitation, stated rather than papered over: one response covers every wrong option; it does not say what to revisit for each one. The course does not record what each separate wrong option means, and this slide does not invent it. Decide your own reteach for each option before the lesson; the options above are the start of it.
+This is a real activity from the experience (pr-l13-s3-c2), so the wording here is the wording a pupil will see.</a:t>
             </a:r>
             <a:endParaRPr lang="en-US" dirty="0"/>
           </a:p>
@@ -780,7 +790,7 @@
           <a:p>
             <a:r>
               <a:rPr lang="en-US" dirty="0"/>
-              <a:t>Use these as a settler, or as something for early finishers to read in the experience.</a:t>
+              <a:t>Make them commit to an answer on paper before they tap the star. Guessing first costs them the learning.</a:t>
             </a:r>
             <a:endParaRPr lang="en-US" dirty="0"/>
           </a:p>
@@ -868,7 +878,7 @@
           <a:p>
             <a:r>
               <a:rPr lang="en-US" dirty="0"/>
-              <a:t>Timed and silent. Mark against the answer sheet, then ask students to record their weakest area.</a:t>
+              <a:t>Use these as a settler, or as something for early finishers to read in the experience.</a:t>
             </a:r>
             <a:endParaRPr lang="en-US" dirty="0"/>
           </a:p>
@@ -956,7 +966,7 @@
           <a:p>
             <a:r>
               <a:rPr lang="en-US" dirty="0"/>
-              <a:t>Students copy their score-screen breakdown onto the worksheet, then rate themselves here.</a:t>
+              <a:t>Timed and silent. Mark against the answer sheet, then ask students to record their weakest area.</a:t>
             </a:r>
             <a:endParaRPr lang="en-US" dirty="0"/>
           </a:p>
@@ -980,6 +990,94 @@
             <a:fld id="{F7021451-1387-4CA6-816F-3879F97B5CBC}" type="slidenum">
               <a:rPr lang="en-US"/>
               <a:t>14</a:t>
+            </a:fld>
+            <a:endParaRPr lang="en-US"/>
+          </a:p>
+        </p:txBody>
+      </p:sp>
+    </p:spTree>
+    <p:extLst>
+      <p:ext uri="{BB962C8B-B14F-4D97-AF65-F5344CB8AC3E}">
+        <p14:creationId xmlns:p14="http://schemas.microsoft.com/office/powerpoint/2010/main" val="1024086991"/>
+      </p:ext>
+    </p:extLst>
+  </p:cSld>
+  <p:clrMapOvr>
+    <a:masterClrMapping/>
+  </p:clrMapOvr>
+</p:notes>
+</file>
+
+<file path=ppt/notesSlides/notesSlide15.xml><?xml version="1.0" encoding="utf-8"?>
+<p:notes xmlns:a="http://schemas.openxmlformats.org/drawingml/2006/main" xmlns:r="http://schemas.openxmlformats.org/officeDocument/2006/relationships" xmlns:p="http://schemas.openxmlformats.org/presentationml/2006/main">
+  <p:cSld>
+    <p:spTree>
+      <p:nvGrpSpPr>
+        <p:cNvPr id="1" name=""/>
+        <p:cNvGrpSpPr/>
+        <p:nvPr/>
+      </p:nvGrpSpPr>
+      <p:grpSpPr>
+        <a:xfrm>
+          <a:off x="0" y="0"/>
+          <a:ext cx="0" cy="0"/>
+          <a:chOff x="0" y="0"/>
+          <a:chExt cx="0" cy="0"/>
+        </a:xfrm>
+      </p:grpSpPr>
+      <p:sp>
+        <p:nvSpPr>
+          <p:cNvPr id="2" name="Slide Image Placeholder 1"/>
+          <p:cNvSpPr>
+            <a:spLocks noGrp="1" noRot="1" noChangeAspect="1"/>
+          </p:cNvSpPr>
+          <p:nvPr>
+            <p:ph type="sldImg"/>
+          </p:nvPr>
+        </p:nvSpPr>
+        <p:spPr/>
+      </p:sp>
+      <p:sp>
+        <p:nvSpPr>
+          <p:cNvPr id="3" name="Notes Placeholder 2"/>
+          <p:cNvSpPr>
+            <a:spLocks noGrp="1"/>
+          </p:cNvSpPr>
+          <p:nvPr>
+            <p:ph type="body" idx="1"/>
+          </p:nvPr>
+        </p:nvSpPr>
+        <p:spPr/>
+        <p:txBody>
+          <a:bodyPr/>
+          <a:lstStyle/>
+          <a:p>
+            <a:r>
+              <a:rPr lang="en-US" dirty="0"/>
+              <a:t>Students copy their score-screen breakdown onto the worksheet, then rate themselves here.</a:t>
+            </a:r>
+            <a:endParaRPr lang="en-US" dirty="0"/>
+          </a:p>
+        </p:txBody>
+      </p:sp>
+      <p:sp>
+        <p:nvSpPr>
+          <p:cNvPr id="4" name="Slide Number Placeholder 3"/>
+          <p:cNvSpPr>
+            <a:spLocks noGrp="1"/>
+          </p:cNvSpPr>
+          <p:nvPr>
+            <p:ph type="sldNum" sz="quarter" idx="10"/>
+          </p:nvPr>
+        </p:nvSpPr>
+        <p:spPr/>
+        <p:txBody>
+          <a:bodyPr/>
+          <a:lstStyle/>
+          <a:p>
+            <a:fld id="{F7021451-1387-4CA6-816F-3879F97B5CBC}" type="slidenum">
+              <a:rPr lang="en-US"/>
+              <a:t>15</a:t>
             </a:fld>
             <a:endParaRPr lang="en-US"/>
           </a:p>
@@ -2949,12 +3047,12 @@
         </p:nvSpPr>
         <p:spPr>
           <a:xfrm>
-            <a:off x="502920" y="438912"/>
-            <a:ext cx="3108960" cy="502920"/>
+            <a:off x="502920" y="457200"/>
+            <a:ext cx="1051560" cy="420624"/>
           </a:xfrm>
           <a:prstGeom prst="roundRect">
             <a:avLst>
-              <a:gd name="adj" fmla="val 18182"/>
+              <a:gd name="adj" fmla="val 21739"/>
             </a:avLst>
           </a:prstGeom>
           <a:solidFill>
@@ -2971,8 +3069,8 @@
         </p:nvSpPr>
         <p:spPr>
           <a:xfrm>
-            <a:off x="502920" y="438912"/>
-            <a:ext cx="3108960" cy="502920"/>
+            <a:off x="502920" y="457200"/>
+            <a:ext cx="1051560" cy="420624"/>
           </a:xfrm>
           <a:prstGeom prst="rect">
             <a:avLst/>
@@ -2988,7 +3086,7 @@
               <a:buNone/>
             </a:pPr>
             <a:r>
-              <a:rPr lang="en-US" sz="1300" b="1" dirty="0">
+              <a:rPr lang="en-US" sz="1200" b="1" dirty="0">
                 <a:solidFill>
                   <a:srgbClr val="101828"/>
                 </a:solidFill>
@@ -2996,9 +3094,9 @@
                 <a:ea typeface="IBM Plex Mono" pitchFamily="34" charset="-122"/>
                 <a:cs typeface="IBM Plex Mono" pitchFamily="34" charset="-120"/>
               </a:rPr>
-              <a:t>★  FINAL CHALLENGE</a:t>
-            </a:r>
-            <a:endParaRPr lang="en-US" sz="1300" dirty="0"/>
+              <a:t>CHECK</a:t>
+            </a:r>
+            <a:endParaRPr lang="en-US" sz="1200" dirty="0"/>
           </a:p>
         </p:txBody>
       </p:sp>
@@ -3010,51 +3108,93 @@
         </p:nvSpPr>
         <p:spPr>
           <a:xfrm>
-            <a:off x="502920" y="1097280"/>
-            <a:ext cx="11155680" cy="731520"/>
-          </a:xfrm>
-          <a:prstGeom prst="rect">
-            <a:avLst/>
-          </a:prstGeom>
-          <a:noFill/>
-          <a:ln/>
-        </p:spPr>
-        <p:txBody>
-          <a:bodyPr wrap="square" lIns="0" tIns="0" rIns="0" bIns="0" rtlCol="0" anchor="ctr"/>
-          <a:lstStyle/>
-          <a:p>
-            <a:pPr indent="0" marL="0">
-              <a:buNone/>
-            </a:pPr>
-            <a:r>
-              <a:rPr lang="en-US" sz="3400" b="1" dirty="0">
-                <a:solidFill>
-                  <a:srgbClr val="101828"/>
+            <a:off x="1737360" y="457200"/>
+            <a:ext cx="9875520" cy="420624"/>
+          </a:xfrm>
+          <a:prstGeom prst="rect">
+            <a:avLst/>
+          </a:prstGeom>
+          <a:noFill/>
+          <a:ln/>
+        </p:spPr>
+        <p:txBody>
+          <a:bodyPr wrap="square" lIns="0" tIns="0" rIns="0" bIns="0" rtlCol="0" anchor="ctr"/>
+          <a:lstStyle/>
+          <a:p>
+            <a:pPr indent="0" marL="0">
+              <a:buNone/>
+            </a:pPr>
+            <a:r>
+              <a:rPr lang="en-US" sz="1500" dirty="0">
+                <a:solidFill>
+                  <a:srgbClr val="667085"/>
                 </a:solidFill>
                 <a:latin typeface="IBM Plex Sans" pitchFamily="34" charset="0"/>
                 <a:ea typeface="IBM Plex Sans" pitchFamily="34" charset="-122"/>
                 <a:cs typeface="IBM Plex Sans" pitchFamily="34" charset="-120"/>
               </a:rPr>
-              <a:t>Build the query</a:t>
-            </a:r>
-            <a:endParaRPr lang="en-US" sz="3400" dirty="0"/>
-          </a:p>
-        </p:txBody>
-      </p:sp>
-      <p:sp>
-        <p:nvSpPr>
-          <p:cNvPr id="8" name="Shape 6"/>
+              <a:t>Hands down. Everyone commits.</a:t>
+            </a:r>
+            <a:endParaRPr lang="en-US" sz="1500" dirty="0"/>
+          </a:p>
+        </p:txBody>
+      </p:sp>
+      <p:sp>
+        <p:nvSpPr>
+          <p:cNvPr id="8" name="Text 6"/>
+          <p:cNvSpPr txBox="1"/>
+          <p:nvPr/>
+        </p:nvSpPr>
+        <p:spPr>
+          <a:xfrm>
+            <a:off x="502920" y="1097280"/>
+            <a:ext cx="11155680" cy="914400"/>
+          </a:xfrm>
+          <a:prstGeom prst="rect">
+            <a:avLst/>
+          </a:prstGeom>
+          <a:noFill/>
+          <a:ln/>
+        </p:spPr>
+        <p:txBody>
+          <a:bodyPr wrap="square" lIns="0" tIns="0" rIns="0" bIns="0" rtlCol="0" anchor="ctr"/>
+          <a:lstStyle/>
+          <a:p>
+            <a:pPr indent="0" marL="0">
+              <a:lnSpc>
+                <a:spcPct val="115000"/>
+              </a:lnSpc>
+              <a:buNone/>
+            </a:pPr>
+            <a:r>
+              <a:rPr lang="en-US" sz="2600" b="1" dirty="0">
+                <a:solidFill>
+                  <a:srgbClr val="101828"/>
+                </a:solidFill>
+                <a:latin typeface="IBM Plex Sans" pitchFamily="34" charset="0"/>
+                <a:ea typeface="IBM Plex Sans" pitchFamily="34" charset="-122"/>
+                <a:cs typeface="IBM Plex Sans" pitchFamily="34" charset="-120"/>
+              </a:rPr>
+              <a:t>What will this program display?</a:t>
+            </a:r>
+            <a:endParaRPr lang="en-US" sz="2600" dirty="0"/>
+          </a:p>
+        </p:txBody>
+      </p:sp>
+      <p:sp>
+        <p:nvSpPr>
+          <p:cNvPr id="9" name="Shape 7"/>
           <p:cNvSpPr/>
           <p:nvPr/>
         </p:nvSpPr>
         <p:spPr>
           <a:xfrm>
-            <a:off x="502920" y="2011680"/>
-            <a:ext cx="11155680" cy="2194560"/>
+            <a:off x="502920" y="2148840"/>
+            <a:ext cx="5029200" cy="3749040"/>
           </a:xfrm>
           <a:prstGeom prst="roundRect">
             <a:avLst>
-              <a:gd name="adj" fmla="val 5000"/>
+              <a:gd name="adj" fmla="val 2927"/>
             </a:avLst>
           </a:prstGeom>
           <a:solidFill>
@@ -3062,7 +3202,7 @@
           </a:solidFill>
           <a:ln w="15875">
             <a:solidFill>
-              <a:srgbClr val="2D63FF"/>
+              <a:srgbClr val="D9DEE7"/>
             </a:solidFill>
             <a:prstDash val="solid"/>
           </a:ln>
@@ -3070,33 +3210,372 @@
       </p:sp>
       <p:sp>
         <p:nvSpPr>
-          <p:cNvPr id="9" name="Text 7"/>
-          <p:cNvSpPr txBox="1"/>
-          <p:nvPr/>
-        </p:nvSpPr>
-        <p:spPr>
-          <a:xfrm>
-            <a:off x="1005840" y="2331720"/>
-            <a:ext cx="10149840" cy="1554480"/>
-          </a:xfrm>
-          <a:prstGeom prst="rect">
-            <a:avLst/>
-          </a:prstGeom>
-          <a:noFill/>
-          <a:ln/>
-        </p:spPr>
-        <p:txBody>
-          <a:bodyPr wrap="square" lIns="0" tIns="0" rIns="0" bIns="0" rtlCol="0" anchor="ctr"/>
+          <p:cNvPr id="10" name="Text 8"/>
+          <p:cNvSpPr txBox="1"/>
+          <p:nvPr/>
+        </p:nvSpPr>
+        <p:spPr>
+          <a:xfrm>
+            <a:off x="822960" y="2350008"/>
+            <a:ext cx="4480560" cy="3346704"/>
+          </a:xfrm>
+          <a:prstGeom prst="rect">
+            <a:avLst/>
+          </a:prstGeom>
+          <a:noFill/>
+          <a:ln/>
+        </p:spPr>
+        <p:txBody>
+          <a:bodyPr wrap="square" lIns="0" tIns="0" rIns="0" bIns="0" rtlCol="0" anchor="t"/>
           <a:lstStyle/>
           <a:p>
             <a:pPr indent="0" marL="0">
               <a:lnSpc>
-                <a:spcPct val="130000"/>
+                <a:spcPct val="125000"/>
               </a:lnSpc>
               <a:buNone/>
             </a:pPr>
             <a:r>
-              <a:rPr lang="en-US" sz="2200" dirty="0">
+              <a:rPr lang="en-US" sz="1500" dirty="0">
+                <a:solidFill>
+                  <a:srgbClr val="101828"/>
+                </a:solidFill>
+                <a:latin typeface="IBM Plex Mono" pitchFamily="34" charset="0"/>
+                <a:ea typeface="IBM Plex Mono" pitchFamily="34" charset="-122"/>
+                <a:cs typeface="IBM Plex Mono" pitchFamily="34" charset="-120"/>
+              </a:rPr>
+              <a:t>import sqlite3</a:t>
+            </a:r>
+            <a:endParaRPr lang="en-US" sz="1500" dirty="0"/>
+          </a:p>
+          <a:p>
+            <a:pPr indent="0" marL="0">
+              <a:lnSpc>
+                <a:spcPct val="125000"/>
+              </a:lnSpc>
+              <a:buNone/>
+            </a:pPr>
+            <a:r>
+              <a:rPr lang="en-US" sz="1500" dirty="0">
+                <a:solidFill>
+                  <a:srgbClr val="101828"/>
+                </a:solidFill>
+                <a:latin typeface="IBM Plex Mono" pitchFamily="34" charset="0"/>
+                <a:ea typeface="IBM Plex Mono" pitchFamily="34" charset="-122"/>
+                <a:cs typeface="IBM Plex Mono" pitchFamily="34" charset="-120"/>
+              </a:rPr>
+              <a:t>db = sqlite3.connect(":memory:")</a:t>
+            </a:r>
+            <a:endParaRPr lang="en-US" sz="1500" dirty="0"/>
+          </a:p>
+          <a:p>
+            <a:pPr indent="0" marL="0">
+              <a:lnSpc>
+                <a:spcPct val="125000"/>
+              </a:lnSpc>
+              <a:buNone/>
+            </a:pPr>
+            <a:r>
+              <a:rPr lang="en-US" sz="1500" dirty="0">
+                <a:solidFill>
+                  <a:srgbClr val="101828"/>
+                </a:solidFill>
+                <a:latin typeface="IBM Plex Mono" pitchFamily="34" charset="0"/>
+                <a:ea typeface="IBM Plex Mono" pitchFamily="34" charset="-122"/>
+                <a:cs typeface="IBM Plex Mono" pitchFamily="34" charset="-120"/>
+              </a:rPr>
+              <a:t>db.execute("CREATE TABLE games (title TEXT, kind TEXT, players INTEGER, minutes INTEGER)")</a:t>
+            </a:r>
+            <a:endParaRPr lang="en-US" sz="1500" dirty="0"/>
+          </a:p>
+          <a:p>
+            <a:pPr indent="0" marL="0">
+              <a:lnSpc>
+                <a:spcPct val="125000"/>
+              </a:lnSpc>
+              <a:buNone/>
+            </a:pPr>
+            <a:r>
+              <a:rPr lang="en-US" sz="1500" dirty="0">
+                <a:solidFill>
+                  <a:srgbClr val="101828"/>
+                </a:solidFill>
+                <a:latin typeface="IBM Plex Mono" pitchFamily="34" charset="0"/>
+                <a:ea typeface="IBM Plex Mono" pitchFamily="34" charset="-122"/>
+                <a:cs typeface="IBM Plex Mono" pitchFamily="34" charset="-120"/>
+              </a:rPr>
+              <a:t>db.execute("INSERT INTO games VALUES ('Snap Dragon', 'card', 4, 15)")</a:t>
+            </a:r>
+            <a:endParaRPr lang="en-US" sz="1500" dirty="0"/>
+          </a:p>
+          <a:p>
+            <a:pPr indent="0" marL="0">
+              <a:lnSpc>
+                <a:spcPct val="125000"/>
+              </a:lnSpc>
+              <a:buNone/>
+            </a:pPr>
+            <a:r>
+              <a:rPr lang="en-US" sz="1500" dirty="0">
+                <a:solidFill>
+                  <a:srgbClr val="101828"/>
+                </a:solidFill>
+                <a:latin typeface="IBM Plex Mono" pitchFamily="34" charset="0"/>
+                <a:ea typeface="IBM Plex Mono" pitchFamily="34" charset="-122"/>
+                <a:cs typeface="IBM Plex Mono" pitchFamily="34" charset="-120"/>
+              </a:rPr>
+              <a:t>db.execute("INSERT INTO games VALUES ('Clay Pigeon', 'dice', 2, 30)")</a:t>
+            </a:r>
+            <a:endParaRPr lang="en-US" sz="1500" dirty="0"/>
+          </a:p>
+          <a:p>
+            <a:pPr indent="0" marL="0">
+              <a:lnSpc>
+                <a:spcPct val="125000"/>
+              </a:lnSpc>
+              <a:buNone/>
+            </a:pPr>
+            <a:r>
+              <a:rPr lang="en-US" sz="1500" dirty="0">
+                <a:solidFill>
+                  <a:srgbClr val="101828"/>
+                </a:solidFill>
+                <a:latin typeface="IBM Plex Mono" pitchFamily="34" charset="0"/>
+                <a:ea typeface="IBM Plex Mono" pitchFamily="34" charset="-122"/>
+                <a:cs typeface="IBM Plex Mono" pitchFamily="34" charset="-120"/>
+              </a:rPr>
+              <a:t>db.execute("INSERT INTO games VALUES ('Willow Gate', 'card', 6, 50)")</a:t>
+            </a:r>
+            <a:endParaRPr lang="en-US" sz="1500" dirty="0"/>
+          </a:p>
+          <a:p>
+            <a:pPr indent="0" marL="0">
+              <a:lnSpc>
+                <a:spcPct val="125000"/>
+              </a:lnSpc>
+              <a:buNone/>
+            </a:pPr>
+            <a:endParaRPr lang="en-US" sz="1500" dirty="0"/>
+          </a:p>
+          <a:p>
+            <a:pPr indent="0" marL="0">
+              <a:lnSpc>
+                <a:spcPct val="125000"/>
+              </a:lnSpc>
+              <a:buNone/>
+            </a:pPr>
+            <a:r>
+              <a:rPr lang="en-US" sz="1500" dirty="0">
+                <a:solidFill>
+                  <a:srgbClr val="101828"/>
+                </a:solidFill>
+                <a:latin typeface="IBM Plex Mono" pitchFamily="34" charset="0"/>
+                <a:ea typeface="IBM Plex Mono" pitchFamily="34" charset="-122"/>
+                <a:cs typeface="IBM Plex Mono" pitchFamily="34" charset="-120"/>
+              </a:rPr>
+              <a:t>for row in db.execute("SELECT title FROM games WHERE minutes &gt; 30"):</a:t>
+            </a:r>
+            <a:endParaRPr lang="en-US" sz="1500" dirty="0"/>
+          </a:p>
+          <a:p>
+            <a:pPr indent="0" marL="0">
+              <a:lnSpc>
+                <a:spcPct val="125000"/>
+              </a:lnSpc>
+              <a:buNone/>
+            </a:pPr>
+            <a:r>
+              <a:rPr lang="en-US" sz="1500" dirty="0">
+                <a:solidFill>
+                  <a:srgbClr val="101828"/>
+                </a:solidFill>
+                <a:latin typeface="IBM Plex Mono" pitchFamily="34" charset="0"/>
+                <a:ea typeface="IBM Plex Mono" pitchFamily="34" charset="-122"/>
+                <a:cs typeface="IBM Plex Mono" pitchFamily="34" charset="-120"/>
+              </a:rPr>
+              <a:t>    print(row[0])</a:t>
+            </a:r>
+            <a:endParaRPr lang="en-US" sz="1500" dirty="0"/>
+          </a:p>
+          <a:p>
+            <a:pPr indent="0" marL="0">
+              <a:lnSpc>
+                <a:spcPct val="125000"/>
+              </a:lnSpc>
+              <a:buNone/>
+            </a:pPr>
+            <a:r>
+              <a:rPr lang="en-US" sz="1500" dirty="0">
+                <a:solidFill>
+                  <a:srgbClr val="101828"/>
+                </a:solidFill>
+                <a:latin typeface="IBM Plex Mono" pitchFamily="34" charset="0"/>
+                <a:ea typeface="IBM Plex Mono" pitchFamily="34" charset="-122"/>
+                <a:cs typeface="IBM Plex Mono" pitchFamily="34" charset="-120"/>
+              </a:rPr>
+              <a:t>print("---")</a:t>
+            </a:r>
+            <a:endParaRPr lang="en-US" sz="1500" dirty="0"/>
+          </a:p>
+          <a:p>
+            <a:pPr indent="0" marL="0">
+              <a:lnSpc>
+                <a:spcPct val="125000"/>
+              </a:lnSpc>
+              <a:buNone/>
+            </a:pPr>
+            <a:r>
+              <a:rPr lang="en-US" sz="1500" dirty="0">
+                <a:solidFill>
+                  <a:srgbClr val="101828"/>
+                </a:solidFill>
+                <a:latin typeface="IBM Plex Mono" pitchFamily="34" charset="0"/>
+                <a:ea typeface="IBM Plex Mono" pitchFamily="34" charset="-122"/>
+                <a:cs typeface="IBM Plex Mono" pitchFamily="34" charset="-120"/>
+              </a:rPr>
+              <a:t>for row in db.execute("SELECT title FROM games WHERE minutes &gt;= 30"):</a:t>
+            </a:r>
+            <a:endParaRPr lang="en-US" sz="1500" dirty="0"/>
+          </a:p>
+          <a:p>
+            <a:pPr indent="0" marL="0">
+              <a:lnSpc>
+                <a:spcPct val="125000"/>
+              </a:lnSpc>
+              <a:buNone/>
+            </a:pPr>
+            <a:r>
+              <a:rPr lang="en-US" sz="1500" dirty="0">
+                <a:solidFill>
+                  <a:srgbClr val="101828"/>
+                </a:solidFill>
+                <a:latin typeface="IBM Plex Mono" pitchFamily="34" charset="0"/>
+                <a:ea typeface="IBM Plex Mono" pitchFamily="34" charset="-122"/>
+                <a:cs typeface="IBM Plex Mono" pitchFamily="34" charset="-120"/>
+              </a:rPr>
+              <a:t>    print(row[0])</a:t>
+            </a:r>
+            <a:endParaRPr lang="en-US" sz="1500" dirty="0"/>
+          </a:p>
+        </p:txBody>
+      </p:sp>
+      <p:sp>
+        <p:nvSpPr>
+          <p:cNvPr id="11" name="Shape 9"/>
+          <p:cNvSpPr/>
+          <p:nvPr/>
+        </p:nvSpPr>
+        <p:spPr>
+          <a:xfrm>
+            <a:off x="5806440" y="2148840"/>
+            <a:ext cx="5852160" cy="731520"/>
+          </a:xfrm>
+          <a:prstGeom prst="roundRect">
+            <a:avLst>
+              <a:gd name="adj" fmla="val 15000"/>
+            </a:avLst>
+          </a:prstGeom>
+          <a:solidFill>
+            <a:srgbClr val="FFFFFF"/>
+          </a:solidFill>
+          <a:ln w="15875">
+            <a:solidFill>
+              <a:srgbClr val="D9DEE7"/>
+            </a:solidFill>
+            <a:prstDash val="solid"/>
+          </a:ln>
+        </p:spPr>
+      </p:sp>
+      <p:sp>
+        <p:nvSpPr>
+          <p:cNvPr id="12" name="Shape 10"/>
+          <p:cNvSpPr/>
+          <p:nvPr/>
+        </p:nvSpPr>
+        <p:spPr>
+          <a:xfrm>
+            <a:off x="6080760" y="2295144"/>
+            <a:ext cx="438912" cy="438912"/>
+          </a:xfrm>
+          <a:prstGeom prst="roundRect">
+            <a:avLst>
+              <a:gd name="adj" fmla="val 20833"/>
+            </a:avLst>
+          </a:prstGeom>
+          <a:solidFill>
+            <a:srgbClr val="EEF2FB"/>
+          </a:solidFill>
+          <a:ln/>
+        </p:spPr>
+      </p:sp>
+      <p:sp>
+        <p:nvSpPr>
+          <p:cNvPr id="13" name="Text 11"/>
+          <p:cNvSpPr txBox="1"/>
+          <p:nvPr/>
+        </p:nvSpPr>
+        <p:spPr>
+          <a:xfrm>
+            <a:off x="6080760" y="2295144"/>
+            <a:ext cx="438912" cy="438912"/>
+          </a:xfrm>
+          <a:prstGeom prst="rect">
+            <a:avLst/>
+          </a:prstGeom>
+          <a:noFill/>
+          <a:ln/>
+        </p:spPr>
+        <p:txBody>
+          <a:bodyPr wrap="square" lIns="0" tIns="0" rIns="0" bIns="0" rtlCol="0" anchor="ctr"/>
+          <a:lstStyle/>
+          <a:p>
+            <a:pPr algn="ctr" indent="0" marL="0">
+              <a:buNone/>
+            </a:pPr>
+            <a:r>
+              <a:rPr lang="en-US" sz="1300" b="1" dirty="0">
+                <a:solidFill>
+                  <a:srgbClr val="2D63FF"/>
+                </a:solidFill>
+                <a:latin typeface="IBM Plex Mono" pitchFamily="34" charset="0"/>
+                <a:ea typeface="IBM Plex Mono" pitchFamily="34" charset="-122"/>
+                <a:cs typeface="IBM Plex Mono" pitchFamily="34" charset="-120"/>
+              </a:rPr>
+              <a:t>A</a:t>
+            </a:r>
+            <a:endParaRPr lang="en-US" sz="1300" dirty="0"/>
+          </a:p>
+        </p:txBody>
+      </p:sp>
+      <p:sp>
+        <p:nvSpPr>
+          <p:cNvPr id="14" name="Text 12"/>
+          <p:cNvSpPr txBox="1"/>
+          <p:nvPr/>
+        </p:nvSpPr>
+        <p:spPr>
+          <a:xfrm>
+            <a:off x="6720840" y="2148840"/>
+            <a:ext cx="4754880" cy="731520"/>
+          </a:xfrm>
+          <a:prstGeom prst="rect">
+            <a:avLst/>
+          </a:prstGeom>
+          <a:noFill/>
+          <a:ln/>
+        </p:spPr>
+        <p:txBody>
+          <a:bodyPr wrap="square" lIns="0" tIns="0" rIns="0" bIns="0" rtlCol="0" anchor="ctr"/>
+          <a:lstStyle/>
+          <a:p>
+            <a:pPr indent="0" marL="0">
+              <a:lnSpc>
+                <a:spcPct val="115000"/>
+              </a:lnSpc>
+              <a:buNone/>
+            </a:pPr>
+            <a:r>
+              <a:rPr lang="en-US" sz="1700" dirty="0">
                 <a:solidFill>
                   <a:srgbClr val="101828"/>
                 </a:solidFill>
@@ -3104,48 +3583,449 @@
                 <a:ea typeface="IBM Plex Sans" pitchFamily="34" charset="-122"/>
                 <a:cs typeface="IBM Plex Sans" pitchFamily="34" charset="-120"/>
               </a:rPr>
-              <a:t>The table games has the fields title, kind, players and minutes. Tap the star and put the clauses of one query into the order SQL needs them.</a:t>
-            </a:r>
-            <a:endParaRPr lang="en-US" sz="2200" dirty="0"/>
-          </a:p>
-        </p:txBody>
-      </p:sp>
-      <p:sp>
-        <p:nvSpPr>
-          <p:cNvPr id="10" name="Text 8"/>
-          <p:cNvSpPr txBox="1"/>
-          <p:nvPr/>
-        </p:nvSpPr>
-        <p:spPr>
-          <a:xfrm>
-            <a:off x="502920" y="4526280"/>
-            <a:ext cx="11155680" cy="457200"/>
-          </a:xfrm>
-          <a:prstGeom prst="rect">
-            <a:avLst/>
-          </a:prstGeom>
-          <a:noFill/>
-          <a:ln/>
-        </p:spPr>
-        <p:txBody>
-          <a:bodyPr wrap="square" lIns="0" tIns="0" rIns="0" bIns="0" rtlCol="0" anchor="ctr"/>
-          <a:lstStyle/>
-          <a:p>
-            <a:pPr indent="0" marL="0">
-              <a:buNone/>
-            </a:pPr>
-            <a:r>
-              <a:rPr lang="en-US" sz="1600" dirty="0">
-                <a:solidFill>
-                  <a:srgbClr val="667085"/>
+              <a:t>Clay Pigeon</a:t>
+            </a:r>
+            <a:endParaRPr lang="en-US" sz="1700" dirty="0"/>
+          </a:p>
+          <a:p>
+            <a:pPr indent="0" marL="0">
+              <a:lnSpc>
+                <a:spcPct val="115000"/>
+              </a:lnSpc>
+              <a:buNone/>
+            </a:pPr>
+            <a:r>
+              <a:rPr lang="en-US" sz="1700" dirty="0">
+                <a:solidFill>
+                  <a:srgbClr val="101828"/>
                 </a:solidFill>
                 <a:latin typeface="IBM Plex Sans" pitchFamily="34" charset="0"/>
                 <a:ea typeface="IBM Plex Sans" pitchFamily="34" charset="-122"/>
                 <a:cs typeface="IBM Plex Sans" pitchFamily="34" charset="-120"/>
               </a:rPr>
-              <a:t>Predict on paper first, then look down and test it.</a:t>
-            </a:r>
-            <a:endParaRPr lang="en-US" sz="1600" dirty="0"/>
+              <a:t>Willow Gate</a:t>
+            </a:r>
+            <a:endParaRPr lang="en-US" sz="1700" dirty="0"/>
+          </a:p>
+          <a:p>
+            <a:pPr indent="0" marL="0">
+              <a:lnSpc>
+                <a:spcPct val="115000"/>
+              </a:lnSpc>
+              <a:buNone/>
+            </a:pPr>
+            <a:r>
+              <a:rPr lang="en-US" sz="1700" dirty="0">
+                <a:solidFill>
+                  <a:srgbClr val="101828"/>
+                </a:solidFill>
+                <a:latin typeface="IBM Plex Sans" pitchFamily="34" charset="0"/>
+                <a:ea typeface="IBM Plex Sans" pitchFamily="34" charset="-122"/>
+                <a:cs typeface="IBM Plex Sans" pitchFamily="34" charset="-120"/>
+              </a:rPr>
+              <a:t>---</a:t>
+            </a:r>
+            <a:endParaRPr lang="en-US" sz="1700" dirty="0"/>
+          </a:p>
+          <a:p>
+            <a:pPr indent="0" marL="0">
+              <a:lnSpc>
+                <a:spcPct val="115000"/>
+              </a:lnSpc>
+              <a:buNone/>
+            </a:pPr>
+            <a:r>
+              <a:rPr lang="en-US" sz="1700" dirty="0">
+                <a:solidFill>
+                  <a:srgbClr val="101828"/>
+                </a:solidFill>
+                <a:latin typeface="IBM Plex Sans" pitchFamily="34" charset="0"/>
+                <a:ea typeface="IBM Plex Sans" pitchFamily="34" charset="-122"/>
+                <a:cs typeface="IBM Plex Sans" pitchFamily="34" charset="-120"/>
+              </a:rPr>
+              <a:t>Clay Pigeon</a:t>
+            </a:r>
+            <a:endParaRPr lang="en-US" sz="1700" dirty="0"/>
+          </a:p>
+          <a:p>
+            <a:pPr indent="0" marL="0">
+              <a:lnSpc>
+                <a:spcPct val="115000"/>
+              </a:lnSpc>
+              <a:buNone/>
+            </a:pPr>
+            <a:r>
+              <a:rPr lang="en-US" sz="1700" dirty="0">
+                <a:solidFill>
+                  <a:srgbClr val="101828"/>
+                </a:solidFill>
+                <a:latin typeface="IBM Plex Sans" pitchFamily="34" charset="0"/>
+                <a:ea typeface="IBM Plex Sans" pitchFamily="34" charset="-122"/>
+                <a:cs typeface="IBM Plex Sans" pitchFamily="34" charset="-120"/>
+              </a:rPr>
+              <a:t>Willow Gate</a:t>
+            </a:r>
+            <a:endParaRPr lang="en-US" sz="1700" dirty="0"/>
+          </a:p>
+        </p:txBody>
+      </p:sp>
+      <p:sp>
+        <p:nvSpPr>
+          <p:cNvPr id="15" name="Shape 13"/>
+          <p:cNvSpPr/>
+          <p:nvPr/>
+        </p:nvSpPr>
+        <p:spPr>
+          <a:xfrm>
+            <a:off x="5806440" y="3017520"/>
+            <a:ext cx="5852160" cy="731520"/>
+          </a:xfrm>
+          <a:prstGeom prst="roundRect">
+            <a:avLst>
+              <a:gd name="adj" fmla="val 15000"/>
+            </a:avLst>
+          </a:prstGeom>
+          <a:solidFill>
+            <a:srgbClr val="FFFFFF"/>
+          </a:solidFill>
+          <a:ln w="15875">
+            <a:solidFill>
+              <a:srgbClr val="D9DEE7"/>
+            </a:solidFill>
+            <a:prstDash val="solid"/>
+          </a:ln>
+        </p:spPr>
+      </p:sp>
+      <p:sp>
+        <p:nvSpPr>
+          <p:cNvPr id="16" name="Shape 14"/>
+          <p:cNvSpPr/>
+          <p:nvPr/>
+        </p:nvSpPr>
+        <p:spPr>
+          <a:xfrm>
+            <a:off x="6080760" y="3163824"/>
+            <a:ext cx="438912" cy="438912"/>
+          </a:xfrm>
+          <a:prstGeom prst="roundRect">
+            <a:avLst>
+              <a:gd name="adj" fmla="val 20833"/>
+            </a:avLst>
+          </a:prstGeom>
+          <a:solidFill>
+            <a:srgbClr val="EEF2FB"/>
+          </a:solidFill>
+          <a:ln/>
+        </p:spPr>
+      </p:sp>
+      <p:sp>
+        <p:nvSpPr>
+          <p:cNvPr id="17" name="Text 15"/>
+          <p:cNvSpPr txBox="1"/>
+          <p:nvPr/>
+        </p:nvSpPr>
+        <p:spPr>
+          <a:xfrm>
+            <a:off x="6080760" y="3163824"/>
+            <a:ext cx="438912" cy="438912"/>
+          </a:xfrm>
+          <a:prstGeom prst="rect">
+            <a:avLst/>
+          </a:prstGeom>
+          <a:noFill/>
+          <a:ln/>
+        </p:spPr>
+        <p:txBody>
+          <a:bodyPr wrap="square" lIns="0" tIns="0" rIns="0" bIns="0" rtlCol="0" anchor="ctr"/>
+          <a:lstStyle/>
+          <a:p>
+            <a:pPr algn="ctr" indent="0" marL="0">
+              <a:buNone/>
+            </a:pPr>
+            <a:r>
+              <a:rPr lang="en-US" sz="1300" b="1" dirty="0">
+                <a:solidFill>
+                  <a:srgbClr val="2D63FF"/>
+                </a:solidFill>
+                <a:latin typeface="IBM Plex Mono" pitchFamily="34" charset="0"/>
+                <a:ea typeface="IBM Plex Mono" pitchFamily="34" charset="-122"/>
+                <a:cs typeface="IBM Plex Mono" pitchFamily="34" charset="-120"/>
+              </a:rPr>
+              <a:t>B</a:t>
+            </a:r>
+            <a:endParaRPr lang="en-US" sz="1300" dirty="0"/>
+          </a:p>
+        </p:txBody>
+      </p:sp>
+      <p:sp>
+        <p:nvSpPr>
+          <p:cNvPr id="18" name="Text 16"/>
+          <p:cNvSpPr txBox="1"/>
+          <p:nvPr/>
+        </p:nvSpPr>
+        <p:spPr>
+          <a:xfrm>
+            <a:off x="6720840" y="3017520"/>
+            <a:ext cx="4754880" cy="731520"/>
+          </a:xfrm>
+          <a:prstGeom prst="rect">
+            <a:avLst/>
+          </a:prstGeom>
+          <a:noFill/>
+          <a:ln/>
+        </p:spPr>
+        <p:txBody>
+          <a:bodyPr wrap="square" lIns="0" tIns="0" rIns="0" bIns="0" rtlCol="0" anchor="ctr"/>
+          <a:lstStyle/>
+          <a:p>
+            <a:pPr indent="0" marL="0">
+              <a:lnSpc>
+                <a:spcPct val="115000"/>
+              </a:lnSpc>
+              <a:buNone/>
+            </a:pPr>
+            <a:r>
+              <a:rPr lang="en-US" sz="1700" dirty="0">
+                <a:solidFill>
+                  <a:srgbClr val="101828"/>
+                </a:solidFill>
+                <a:latin typeface="IBM Plex Sans" pitchFamily="34" charset="0"/>
+                <a:ea typeface="IBM Plex Sans" pitchFamily="34" charset="-122"/>
+                <a:cs typeface="IBM Plex Sans" pitchFamily="34" charset="-120"/>
+              </a:rPr>
+              <a:t>Willow Gate</a:t>
+            </a:r>
+            <a:endParaRPr lang="en-US" sz="1700" dirty="0"/>
+          </a:p>
+          <a:p>
+            <a:pPr indent="0" marL="0">
+              <a:lnSpc>
+                <a:spcPct val="115000"/>
+              </a:lnSpc>
+              <a:buNone/>
+            </a:pPr>
+            <a:r>
+              <a:rPr lang="en-US" sz="1700" dirty="0">
+                <a:solidFill>
+                  <a:srgbClr val="101828"/>
+                </a:solidFill>
+                <a:latin typeface="IBM Plex Sans" pitchFamily="34" charset="0"/>
+                <a:ea typeface="IBM Plex Sans" pitchFamily="34" charset="-122"/>
+                <a:cs typeface="IBM Plex Sans" pitchFamily="34" charset="-120"/>
+              </a:rPr>
+              <a:t>---</a:t>
+            </a:r>
+            <a:endParaRPr lang="en-US" sz="1700" dirty="0"/>
+          </a:p>
+          <a:p>
+            <a:pPr indent="0" marL="0">
+              <a:lnSpc>
+                <a:spcPct val="115000"/>
+              </a:lnSpc>
+              <a:buNone/>
+            </a:pPr>
+            <a:r>
+              <a:rPr lang="en-US" sz="1700" dirty="0">
+                <a:solidFill>
+                  <a:srgbClr val="101828"/>
+                </a:solidFill>
+                <a:latin typeface="IBM Plex Sans" pitchFamily="34" charset="0"/>
+                <a:ea typeface="IBM Plex Sans" pitchFamily="34" charset="-122"/>
+                <a:cs typeface="IBM Plex Sans" pitchFamily="34" charset="-120"/>
+              </a:rPr>
+              <a:t>Clay Pigeon</a:t>
+            </a:r>
+            <a:endParaRPr lang="en-US" sz="1700" dirty="0"/>
+          </a:p>
+          <a:p>
+            <a:pPr indent="0" marL="0">
+              <a:lnSpc>
+                <a:spcPct val="115000"/>
+              </a:lnSpc>
+              <a:buNone/>
+            </a:pPr>
+            <a:r>
+              <a:rPr lang="en-US" sz="1700" dirty="0">
+                <a:solidFill>
+                  <a:srgbClr val="101828"/>
+                </a:solidFill>
+                <a:latin typeface="IBM Plex Sans" pitchFamily="34" charset="0"/>
+                <a:ea typeface="IBM Plex Sans" pitchFamily="34" charset="-122"/>
+                <a:cs typeface="IBM Plex Sans" pitchFamily="34" charset="-120"/>
+              </a:rPr>
+              <a:t>Willow Gate</a:t>
+            </a:r>
+            <a:endParaRPr lang="en-US" sz="1700" dirty="0"/>
+          </a:p>
+        </p:txBody>
+      </p:sp>
+      <p:sp>
+        <p:nvSpPr>
+          <p:cNvPr id="19" name="Shape 17"/>
+          <p:cNvSpPr/>
+          <p:nvPr/>
+        </p:nvSpPr>
+        <p:spPr>
+          <a:xfrm>
+            <a:off x="5806440" y="3886200"/>
+            <a:ext cx="5852160" cy="731520"/>
+          </a:xfrm>
+          <a:prstGeom prst="roundRect">
+            <a:avLst>
+              <a:gd name="adj" fmla="val 15000"/>
+            </a:avLst>
+          </a:prstGeom>
+          <a:solidFill>
+            <a:srgbClr val="FFFFFF"/>
+          </a:solidFill>
+          <a:ln w="15875">
+            <a:solidFill>
+              <a:srgbClr val="D9DEE7"/>
+            </a:solidFill>
+            <a:prstDash val="solid"/>
+          </a:ln>
+        </p:spPr>
+      </p:sp>
+      <p:sp>
+        <p:nvSpPr>
+          <p:cNvPr id="20" name="Shape 18"/>
+          <p:cNvSpPr/>
+          <p:nvPr/>
+        </p:nvSpPr>
+        <p:spPr>
+          <a:xfrm>
+            <a:off x="6080760" y="4032504"/>
+            <a:ext cx="438912" cy="438912"/>
+          </a:xfrm>
+          <a:prstGeom prst="roundRect">
+            <a:avLst>
+              <a:gd name="adj" fmla="val 20833"/>
+            </a:avLst>
+          </a:prstGeom>
+          <a:solidFill>
+            <a:srgbClr val="EEF2FB"/>
+          </a:solidFill>
+          <a:ln/>
+        </p:spPr>
+      </p:sp>
+      <p:sp>
+        <p:nvSpPr>
+          <p:cNvPr id="21" name="Text 19"/>
+          <p:cNvSpPr txBox="1"/>
+          <p:nvPr/>
+        </p:nvSpPr>
+        <p:spPr>
+          <a:xfrm>
+            <a:off x="6080760" y="4032504"/>
+            <a:ext cx="438912" cy="438912"/>
+          </a:xfrm>
+          <a:prstGeom prst="rect">
+            <a:avLst/>
+          </a:prstGeom>
+          <a:noFill/>
+          <a:ln/>
+        </p:spPr>
+        <p:txBody>
+          <a:bodyPr wrap="square" lIns="0" tIns="0" rIns="0" bIns="0" rtlCol="0" anchor="ctr"/>
+          <a:lstStyle/>
+          <a:p>
+            <a:pPr algn="ctr" indent="0" marL="0">
+              <a:buNone/>
+            </a:pPr>
+            <a:r>
+              <a:rPr lang="en-US" sz="1300" b="1" dirty="0">
+                <a:solidFill>
+                  <a:srgbClr val="2D63FF"/>
+                </a:solidFill>
+                <a:latin typeface="IBM Plex Mono" pitchFamily="34" charset="0"/>
+                <a:ea typeface="IBM Plex Mono" pitchFamily="34" charset="-122"/>
+                <a:cs typeface="IBM Plex Mono" pitchFamily="34" charset="-120"/>
+              </a:rPr>
+              <a:t>C</a:t>
+            </a:r>
+            <a:endParaRPr lang="en-US" sz="1300" dirty="0"/>
+          </a:p>
+        </p:txBody>
+      </p:sp>
+      <p:sp>
+        <p:nvSpPr>
+          <p:cNvPr id="22" name="Text 20"/>
+          <p:cNvSpPr txBox="1"/>
+          <p:nvPr/>
+        </p:nvSpPr>
+        <p:spPr>
+          <a:xfrm>
+            <a:off x="6720840" y="3886200"/>
+            <a:ext cx="4754880" cy="731520"/>
+          </a:xfrm>
+          <a:prstGeom prst="rect">
+            <a:avLst/>
+          </a:prstGeom>
+          <a:noFill/>
+          <a:ln/>
+        </p:spPr>
+        <p:txBody>
+          <a:bodyPr wrap="square" lIns="0" tIns="0" rIns="0" bIns="0" rtlCol="0" anchor="ctr"/>
+          <a:lstStyle/>
+          <a:p>
+            <a:pPr indent="0" marL="0">
+              <a:lnSpc>
+                <a:spcPct val="115000"/>
+              </a:lnSpc>
+              <a:buNone/>
+            </a:pPr>
+            <a:r>
+              <a:rPr lang="en-US" sz="1700" dirty="0">
+                <a:solidFill>
+                  <a:srgbClr val="101828"/>
+                </a:solidFill>
+                <a:latin typeface="IBM Plex Sans" pitchFamily="34" charset="0"/>
+                <a:ea typeface="IBM Plex Sans" pitchFamily="34" charset="-122"/>
+                <a:cs typeface="IBM Plex Sans" pitchFamily="34" charset="-120"/>
+              </a:rPr>
+              <a:t>Willow Gate</a:t>
+            </a:r>
+            <a:endParaRPr lang="en-US" sz="1700" dirty="0"/>
+          </a:p>
+          <a:p>
+            <a:pPr indent="0" marL="0">
+              <a:lnSpc>
+                <a:spcPct val="115000"/>
+              </a:lnSpc>
+              <a:buNone/>
+            </a:pPr>
+            <a:r>
+              <a:rPr lang="en-US" sz="1700" dirty="0">
+                <a:solidFill>
+                  <a:srgbClr val="101828"/>
+                </a:solidFill>
+                <a:latin typeface="IBM Plex Sans" pitchFamily="34" charset="0"/>
+                <a:ea typeface="IBM Plex Sans" pitchFamily="34" charset="-122"/>
+                <a:cs typeface="IBM Plex Sans" pitchFamily="34" charset="-120"/>
+              </a:rPr>
+              <a:t>---</a:t>
+            </a:r>
+            <a:endParaRPr lang="en-US" sz="1700" dirty="0"/>
+          </a:p>
+          <a:p>
+            <a:pPr indent="0" marL="0">
+              <a:lnSpc>
+                <a:spcPct val="115000"/>
+              </a:lnSpc>
+              <a:buNone/>
+            </a:pPr>
+            <a:r>
+              <a:rPr lang="en-US" sz="1700" dirty="0">
+                <a:solidFill>
+                  <a:srgbClr val="101828"/>
+                </a:solidFill>
+                <a:latin typeface="IBM Plex Sans" pitchFamily="34" charset="0"/>
+                <a:ea typeface="IBM Plex Sans" pitchFamily="34" charset="-122"/>
+                <a:cs typeface="IBM Plex Sans" pitchFamily="34" charset="-120"/>
+              </a:rPr>
+              <a:t>Willow Gate</a:t>
+            </a:r>
+            <a:endParaRPr lang="en-US" sz="1700" dirty="0"/>
           </a:p>
         </p:txBody>
       </p:sp>
@@ -3281,30 +4161,91 @@
       </p:sp>
       <p:sp>
         <p:nvSpPr>
-          <p:cNvPr id="5" name="Text 3"/>
-          <p:cNvSpPr txBox="1"/>
-          <p:nvPr/>
-        </p:nvSpPr>
-        <p:spPr>
-          <a:xfrm>
-            <a:off x="502920" y="411480"/>
-            <a:ext cx="11155680" cy="777240"/>
-          </a:xfrm>
-          <a:prstGeom prst="rect">
-            <a:avLst/>
-          </a:prstGeom>
-          <a:noFill/>
-          <a:ln/>
-        </p:spPr>
-        <p:txBody>
-          <a:bodyPr wrap="square" lIns="0" tIns="0" rIns="0" bIns="0" rtlCol="0" anchor="ctr"/>
-          <a:lstStyle/>
-          <a:p>
-            <a:pPr indent="0" marL="0">
-              <a:buNone/>
-            </a:pPr>
-            <a:r>
-              <a:rPr lang="en-US" sz="3200" b="1" dirty="0">
+          <p:cNvPr id="5" name="Shape 3"/>
+          <p:cNvSpPr/>
+          <p:nvPr/>
+        </p:nvSpPr>
+        <p:spPr>
+          <a:xfrm>
+            <a:off x="502920" y="438912"/>
+            <a:ext cx="3108960" cy="502920"/>
+          </a:xfrm>
+          <a:prstGeom prst="roundRect">
+            <a:avLst>
+              <a:gd name="adj" fmla="val 18182"/>
+            </a:avLst>
+          </a:prstGeom>
+          <a:solidFill>
+            <a:srgbClr val="F4B942"/>
+          </a:solidFill>
+          <a:ln/>
+        </p:spPr>
+      </p:sp>
+      <p:sp>
+        <p:nvSpPr>
+          <p:cNvPr id="6" name="Text 4"/>
+          <p:cNvSpPr txBox="1"/>
+          <p:nvPr/>
+        </p:nvSpPr>
+        <p:spPr>
+          <a:xfrm>
+            <a:off x="502920" y="438912"/>
+            <a:ext cx="3108960" cy="502920"/>
+          </a:xfrm>
+          <a:prstGeom prst="rect">
+            <a:avLst/>
+          </a:prstGeom>
+          <a:noFill/>
+          <a:ln/>
+        </p:spPr>
+        <p:txBody>
+          <a:bodyPr wrap="square" lIns="0" tIns="0" rIns="0" bIns="0" rtlCol="0" anchor="ctr"/>
+          <a:lstStyle/>
+          <a:p>
+            <a:pPr algn="ctr" indent="0" marL="0">
+              <a:buNone/>
+            </a:pPr>
+            <a:r>
+              <a:rPr lang="en-US" sz="1300" b="1" dirty="0">
+                <a:solidFill>
+                  <a:srgbClr val="101828"/>
+                </a:solidFill>
+                <a:latin typeface="IBM Plex Mono" pitchFamily="34" charset="0"/>
+                <a:ea typeface="IBM Plex Mono" pitchFamily="34" charset="-122"/>
+                <a:cs typeface="IBM Plex Mono" pitchFamily="34" charset="-120"/>
+              </a:rPr>
+              <a:t>★  FINAL CHALLENGE</a:t>
+            </a:r>
+            <a:endParaRPr lang="en-US" sz="1300" dirty="0"/>
+          </a:p>
+        </p:txBody>
+      </p:sp>
+      <p:sp>
+        <p:nvSpPr>
+          <p:cNvPr id="7" name="Text 5"/>
+          <p:cNvSpPr txBox="1"/>
+          <p:nvPr/>
+        </p:nvSpPr>
+        <p:spPr>
+          <a:xfrm>
+            <a:off x="502920" y="1097280"/>
+            <a:ext cx="11155680" cy="731520"/>
+          </a:xfrm>
+          <a:prstGeom prst="rect">
+            <a:avLst/>
+          </a:prstGeom>
+          <a:noFill/>
+          <a:ln/>
+        </p:spPr>
+        <p:txBody>
+          <a:bodyPr wrap="square" lIns="0" tIns="0" rIns="0" bIns="0" rtlCol="0" anchor="ctr"/>
+          <a:lstStyle/>
+          <a:p>
+            <a:pPr indent="0" marL="0">
+              <a:buNone/>
+            </a:pPr>
+            <a:r>
+              <a:rPr lang="en-US" sz="3400" b="1" dirty="0">
                 <a:solidFill>
                   <a:srgbClr val="101828"/>
                 </a:solidFill>
@@ -3312,65 +4253,26 @@
                 <a:ea typeface="IBM Plex Sans" pitchFamily="34" charset="-122"/>
                 <a:cs typeface="IBM Plex Sans" pitchFamily="34" charset="-120"/>
               </a:rPr>
-              <a:t>Worth knowing</a:t>
-            </a:r>
-            <a:endParaRPr lang="en-US" sz="3200" dirty="0"/>
-          </a:p>
-        </p:txBody>
-      </p:sp>
-      <p:sp>
-        <p:nvSpPr>
-          <p:cNvPr id="6" name="Text 4"/>
-          <p:cNvSpPr txBox="1"/>
-          <p:nvPr/>
-        </p:nvSpPr>
-        <p:spPr>
-          <a:xfrm>
-            <a:off x="502920" y="1170432"/>
-            <a:ext cx="11155680" cy="411480"/>
-          </a:xfrm>
-          <a:prstGeom prst="rect">
-            <a:avLst/>
-          </a:prstGeom>
-          <a:noFill/>
-          <a:ln/>
-        </p:spPr>
-        <p:txBody>
-          <a:bodyPr wrap="square" lIns="0" tIns="0" rIns="0" bIns="0" rtlCol="0" anchor="ctr"/>
-          <a:lstStyle/>
-          <a:p>
-            <a:pPr indent="0" marL="0">
-              <a:buNone/>
-            </a:pPr>
-            <a:r>
-              <a:rPr lang="en-US" sz="1500" dirty="0">
-                <a:solidFill>
-                  <a:srgbClr val="667085"/>
-                </a:solidFill>
-                <a:latin typeface="IBM Plex Sans" pitchFamily="34" charset="0"/>
-                <a:ea typeface="IBM Plex Sans" pitchFamily="34" charset="-122"/>
-                <a:cs typeface="IBM Plex Sans" pitchFamily="34" charset="-120"/>
-              </a:rPr>
-              <a:t>The information markers dotted around the room</a:t>
-            </a:r>
-            <a:endParaRPr lang="en-US" sz="1500" dirty="0"/>
-          </a:p>
-        </p:txBody>
-      </p:sp>
-      <p:sp>
-        <p:nvSpPr>
-          <p:cNvPr id="7" name="Shape 5"/>
+              <a:t>Build the query</a:t>
+            </a:r>
+            <a:endParaRPr lang="en-US" sz="3400" dirty="0"/>
+          </a:p>
+        </p:txBody>
+      </p:sp>
+      <p:sp>
+        <p:nvSpPr>
+          <p:cNvPr id="8" name="Shape 6"/>
           <p:cNvSpPr/>
           <p:nvPr/>
         </p:nvSpPr>
         <p:spPr>
           <a:xfrm>
-            <a:off x="502920" y="1828800"/>
-            <a:ext cx="5394960" cy="1737360"/>
+            <a:off x="502920" y="2011680"/>
+            <a:ext cx="11155680" cy="2194560"/>
           </a:xfrm>
           <a:prstGeom prst="roundRect">
             <a:avLst>
-              <a:gd name="adj" fmla="val 6316"/>
+              <a:gd name="adj" fmla="val 5000"/>
             </a:avLst>
           </a:prstGeom>
           <a:solidFill>
@@ -3386,72 +4288,72 @@
       </p:sp>
       <p:sp>
         <p:nvSpPr>
-          <p:cNvPr id="8" name="Text 6"/>
-          <p:cNvSpPr txBox="1"/>
-          <p:nvPr/>
-        </p:nvSpPr>
-        <p:spPr>
-          <a:xfrm>
-            <a:off x="822960" y="2011680"/>
-            <a:ext cx="4754880" cy="365760"/>
-          </a:xfrm>
-          <a:prstGeom prst="rect">
-            <a:avLst/>
-          </a:prstGeom>
-          <a:noFill/>
-          <a:ln/>
-        </p:spPr>
-        <p:txBody>
-          <a:bodyPr wrap="square" lIns="0" tIns="0" rIns="0" bIns="0" rtlCol="0" anchor="ctr"/>
-          <a:lstStyle/>
-          <a:p>
-            <a:pPr indent="0" marL="0">
-              <a:buNone/>
-            </a:pPr>
-            <a:r>
-              <a:rPr lang="en-US" sz="1600" b="1" dirty="0">
-                <a:solidFill>
-                  <a:srgbClr val="2D63FF"/>
+          <p:cNvPr id="9" name="Text 7"/>
+          <p:cNvSpPr txBox="1"/>
+          <p:nvPr/>
+        </p:nvSpPr>
+        <p:spPr>
+          <a:xfrm>
+            <a:off x="1005840" y="2331720"/>
+            <a:ext cx="10149840" cy="1554480"/>
+          </a:xfrm>
+          <a:prstGeom prst="rect">
+            <a:avLst/>
+          </a:prstGeom>
+          <a:noFill/>
+          <a:ln/>
+        </p:spPr>
+        <p:txBody>
+          <a:bodyPr wrap="square" lIns="0" tIns="0" rIns="0" bIns="0" rtlCol="0" anchor="ctr"/>
+          <a:lstStyle/>
+          <a:p>
+            <a:pPr indent="0" marL="0">
+              <a:lnSpc>
+                <a:spcPct val="130000"/>
+              </a:lnSpc>
+              <a:buNone/>
+            </a:pPr>
+            <a:r>
+              <a:rPr lang="en-US" sz="2200" dirty="0">
+                <a:solidFill>
+                  <a:srgbClr val="101828"/>
                 </a:solidFill>
                 <a:latin typeface="IBM Plex Sans" pitchFamily="34" charset="0"/>
                 <a:ea typeface="IBM Plex Sans" pitchFamily="34" charset="-122"/>
                 <a:cs typeface="IBM Plex Sans" pitchFamily="34" charset="-120"/>
               </a:rPr>
-              <a:t>Asking, not telling</a:t>
-            </a:r>
-            <a:endParaRPr lang="en-US" sz="1600" dirty="0"/>
-          </a:p>
-        </p:txBody>
-      </p:sp>
-      <p:sp>
-        <p:nvSpPr>
-          <p:cNvPr id="9" name="Text 7"/>
-          <p:cNvSpPr txBox="1"/>
-          <p:nvPr/>
-        </p:nvSpPr>
-        <p:spPr>
-          <a:xfrm>
-            <a:off x="822960" y="2395728"/>
-            <a:ext cx="4754880" cy="1005840"/>
-          </a:xfrm>
-          <a:prstGeom prst="rect">
-            <a:avLst/>
-          </a:prstGeom>
-          <a:noFill/>
-          <a:ln/>
-        </p:spPr>
-        <p:txBody>
-          <a:bodyPr wrap="square" lIns="0" tIns="0" rIns="0" bIns="0" rtlCol="0" anchor="t"/>
-          <a:lstStyle/>
-          <a:p>
-            <a:pPr indent="0" marL="0">
-              <a:lnSpc>
-                <a:spcPct val="120000"/>
-              </a:lnSpc>
-              <a:buNone/>
-            </a:pPr>
-            <a:r>
-              <a:rPr lang="en-US" sz="1300" dirty="0">
+              <a:t>The table games has the fields title, kind, players and minutes. Tap the star and put the clauses of one query into the order SQL needs them.</a:t>
+            </a:r>
+            <a:endParaRPr lang="en-US" sz="2200" dirty="0"/>
+          </a:p>
+        </p:txBody>
+      </p:sp>
+      <p:sp>
+        <p:nvSpPr>
+          <p:cNvPr id="10" name="Text 8"/>
+          <p:cNvSpPr txBox="1"/>
+          <p:nvPr/>
+        </p:nvSpPr>
+        <p:spPr>
+          <a:xfrm>
+            <a:off x="502920" y="4526280"/>
+            <a:ext cx="11155680" cy="457200"/>
+          </a:xfrm>
+          <a:prstGeom prst="rect">
+            <a:avLst/>
+          </a:prstGeom>
+          <a:noFill/>
+          <a:ln/>
+        </p:spPr>
+        <p:txBody>
+          <a:bodyPr wrap="square" lIns="0" tIns="0" rIns="0" bIns="0" rtlCol="0" anchor="ctr"/>
+          <a:lstStyle/>
+          <a:p>
+            <a:pPr indent="0" marL="0">
+              <a:buNone/>
+            </a:pPr>
+            <a:r>
+              <a:rPr lang="en-US" sz="1600" dirty="0">
                 <a:solidFill>
                   <a:srgbClr val="667085"/>
                 </a:solidFill>
@@ -3459,333 +4361,9 @@
                 <a:ea typeface="IBM Plex Sans" pitchFamily="34" charset="-122"/>
                 <a:cs typeface="IBM Plex Sans" pitchFamily="34" charset="-120"/>
               </a:rPr>
-              <a:t>SQL says what you want, not how to get it. The database works the steps out for itself.</a:t>
-            </a:r>
-            <a:endParaRPr lang="en-US" sz="1300" dirty="0"/>
-          </a:p>
-        </p:txBody>
-      </p:sp>
-      <p:sp>
-        <p:nvSpPr>
-          <p:cNvPr id="10" name="Shape 8"/>
-          <p:cNvSpPr/>
-          <p:nvPr/>
-        </p:nvSpPr>
-        <p:spPr>
-          <a:xfrm>
-            <a:off x="6217920" y="1828800"/>
-            <a:ext cx="5394960" cy="1737360"/>
-          </a:xfrm>
-          <a:prstGeom prst="roundRect">
-            <a:avLst>
-              <a:gd name="adj" fmla="val 6316"/>
-            </a:avLst>
-          </a:prstGeom>
-          <a:solidFill>
-            <a:srgbClr val="FFFFFF"/>
-          </a:solidFill>
-          <a:ln w="15875">
-            <a:solidFill>
-              <a:srgbClr val="08A6A6"/>
-            </a:solidFill>
-            <a:prstDash val="solid"/>
-          </a:ln>
-        </p:spPr>
-      </p:sp>
-      <p:sp>
-        <p:nvSpPr>
-          <p:cNvPr id="11" name="Text 9"/>
-          <p:cNvSpPr txBox="1"/>
-          <p:nvPr/>
-        </p:nvSpPr>
-        <p:spPr>
-          <a:xfrm>
-            <a:off x="6537960" y="2011680"/>
-            <a:ext cx="4754880" cy="365760"/>
-          </a:xfrm>
-          <a:prstGeom prst="rect">
-            <a:avLst/>
-          </a:prstGeom>
-          <a:noFill/>
-          <a:ln/>
-        </p:spPr>
-        <p:txBody>
-          <a:bodyPr wrap="square" lIns="0" tIns="0" rIns="0" bIns="0" rtlCol="0" anchor="ctr"/>
-          <a:lstStyle/>
-          <a:p>
-            <a:pPr indent="0" marL="0">
-              <a:buNone/>
-            </a:pPr>
-            <a:r>
-              <a:rPr lang="en-US" sz="1600" b="1" dirty="0">
-                <a:solidFill>
-                  <a:srgbClr val="08A6A6"/>
-                </a:solidFill>
-                <a:latin typeface="IBM Plex Sans" pitchFamily="34" charset="0"/>
-                <a:ea typeface="IBM Plex Sans" pitchFamily="34" charset="-122"/>
-                <a:cs typeface="IBM Plex Sans" pitchFamily="34" charset="-120"/>
-              </a:rPr>
-              <a:t>Quotes matter</a:t>
+              <a:t>Predict on paper first, then look down and test it.</a:t>
             </a:r>
             <a:endParaRPr lang="en-US" sz="1600" dirty="0"/>
-          </a:p>
-        </p:txBody>
-      </p:sp>
-      <p:sp>
-        <p:nvSpPr>
-          <p:cNvPr id="12" name="Text 10"/>
-          <p:cNvSpPr txBox="1"/>
-          <p:nvPr/>
-        </p:nvSpPr>
-        <p:spPr>
-          <a:xfrm>
-            <a:off x="6537960" y="2395728"/>
-            <a:ext cx="4754880" cy="1005840"/>
-          </a:xfrm>
-          <a:prstGeom prst="rect">
-            <a:avLst/>
-          </a:prstGeom>
-          <a:noFill/>
-          <a:ln/>
-        </p:spPr>
-        <p:txBody>
-          <a:bodyPr wrap="square" lIns="0" tIns="0" rIns="0" bIns="0" rtlCol="0" anchor="t"/>
-          <a:lstStyle/>
-          <a:p>
-            <a:pPr indent="0" marL="0">
-              <a:lnSpc>
-                <a:spcPct val="120000"/>
-              </a:lnSpc>
-              <a:buNone/>
-            </a:pPr>
-            <a:r>
-              <a:rPr lang="en-US" sz="1300" dirty="0">
-                <a:solidFill>
-                  <a:srgbClr val="667085"/>
-                </a:solidFill>
-                <a:latin typeface="IBM Plex Sans" pitchFamily="34" charset="0"/>
-                <a:ea typeface="IBM Plex Sans" pitchFamily="34" charset="-122"/>
-                <a:cs typeface="IBM Plex Sans" pitchFamily="34" charset="-120"/>
-              </a:rPr>
-              <a:t>WHERE kind = card looks for a field called card and fails. WHERE kind = 'card' looks for the word.</a:t>
-            </a:r>
-            <a:endParaRPr lang="en-US" sz="1300" dirty="0"/>
-          </a:p>
-        </p:txBody>
-      </p:sp>
-      <p:sp>
-        <p:nvSpPr>
-          <p:cNvPr id="13" name="Shape 11"/>
-          <p:cNvSpPr/>
-          <p:nvPr/>
-        </p:nvSpPr>
-        <p:spPr>
-          <a:xfrm>
-            <a:off x="502920" y="3794760"/>
-            <a:ext cx="5394960" cy="1737360"/>
-          </a:xfrm>
-          <a:prstGeom prst="roundRect">
-            <a:avLst>
-              <a:gd name="adj" fmla="val 6316"/>
-            </a:avLst>
-          </a:prstGeom>
-          <a:solidFill>
-            <a:srgbClr val="FFFFFF"/>
-          </a:solidFill>
-          <a:ln w="15875">
-            <a:solidFill>
-              <a:srgbClr val="2D63FF"/>
-            </a:solidFill>
-            <a:prstDash val="solid"/>
-          </a:ln>
-        </p:spPr>
-      </p:sp>
-      <p:sp>
-        <p:nvSpPr>
-          <p:cNvPr id="14" name="Text 12"/>
-          <p:cNvSpPr txBox="1"/>
-          <p:nvPr/>
-        </p:nvSpPr>
-        <p:spPr>
-          <a:xfrm>
-            <a:off x="822960" y="3977640"/>
-            <a:ext cx="4754880" cy="365760"/>
-          </a:xfrm>
-          <a:prstGeom prst="rect">
-            <a:avLst/>
-          </a:prstGeom>
-          <a:noFill/>
-          <a:ln/>
-        </p:spPr>
-        <p:txBody>
-          <a:bodyPr wrap="square" lIns="0" tIns="0" rIns="0" bIns="0" rtlCol="0" anchor="ctr"/>
-          <a:lstStyle/>
-          <a:p>
-            <a:pPr indent="0" marL="0">
-              <a:buNone/>
-            </a:pPr>
-            <a:r>
-              <a:rPr lang="en-US" sz="1600" b="1" dirty="0">
-                <a:solidFill>
-                  <a:srgbClr val="2D63FF"/>
-                </a:solidFill>
-                <a:latin typeface="IBM Plex Sans" pitchFamily="34" charset="0"/>
-                <a:ea typeface="IBM Plex Sans" pitchFamily="34" charset="-122"/>
-                <a:cs typeface="IBM Plex Sans" pitchFamily="34" charset="-120"/>
-              </a:rPr>
-              <a:t>Boundaries again</a:t>
-            </a:r>
-            <a:endParaRPr lang="en-US" sz="1600" dirty="0"/>
-          </a:p>
-        </p:txBody>
-      </p:sp>
-      <p:sp>
-        <p:nvSpPr>
-          <p:cNvPr id="15" name="Text 13"/>
-          <p:cNvSpPr txBox="1"/>
-          <p:nvPr/>
-        </p:nvSpPr>
-        <p:spPr>
-          <a:xfrm>
-            <a:off x="822960" y="4361688"/>
-            <a:ext cx="4754880" cy="1005840"/>
-          </a:xfrm>
-          <a:prstGeom prst="rect">
-            <a:avLst/>
-          </a:prstGeom>
-          <a:noFill/>
-          <a:ln/>
-        </p:spPr>
-        <p:txBody>
-          <a:bodyPr wrap="square" lIns="0" tIns="0" rIns="0" bIns="0" rtlCol="0" anchor="t"/>
-          <a:lstStyle/>
-          <a:p>
-            <a:pPr indent="0" marL="0">
-              <a:lnSpc>
-                <a:spcPct val="120000"/>
-              </a:lnSpc>
-              <a:buNone/>
-            </a:pPr>
-            <a:r>
-              <a:rPr lang="en-US" sz="1300" dirty="0">
-                <a:solidFill>
-                  <a:srgbClr val="667085"/>
-                </a:solidFill>
-                <a:latin typeface="IBM Plex Sans" pitchFamily="34" charset="0"/>
-                <a:ea typeface="IBM Plex Sans" pitchFamily="34" charset="-122"/>
-                <a:cs typeface="IBM Plex Sans" pitchFamily="34" charset="-120"/>
-              </a:rPr>
-              <a:t>'Over 60' and '60 or more' are different queries. The off-by-one that bites in Python bites here too.</a:t>
-            </a:r>
-            <a:endParaRPr lang="en-US" sz="1300" dirty="0"/>
-          </a:p>
-        </p:txBody>
-      </p:sp>
-      <p:sp>
-        <p:nvSpPr>
-          <p:cNvPr id="16" name="Shape 14"/>
-          <p:cNvSpPr/>
-          <p:nvPr/>
-        </p:nvSpPr>
-        <p:spPr>
-          <a:xfrm>
-            <a:off x="6217920" y="3794760"/>
-            <a:ext cx="5394960" cy="1737360"/>
-          </a:xfrm>
-          <a:prstGeom prst="roundRect">
-            <a:avLst>
-              <a:gd name="adj" fmla="val 6316"/>
-            </a:avLst>
-          </a:prstGeom>
-          <a:solidFill>
-            <a:srgbClr val="FFFFFF"/>
-          </a:solidFill>
-          <a:ln w="15875">
-            <a:solidFill>
-              <a:srgbClr val="08A6A6"/>
-            </a:solidFill>
-            <a:prstDash val="solid"/>
-          </a:ln>
-        </p:spPr>
-      </p:sp>
-      <p:sp>
-        <p:nvSpPr>
-          <p:cNvPr id="17" name="Text 15"/>
-          <p:cNvSpPr txBox="1"/>
-          <p:nvPr/>
-        </p:nvSpPr>
-        <p:spPr>
-          <a:xfrm>
-            <a:off x="6537960" y="3977640"/>
-            <a:ext cx="4754880" cy="365760"/>
-          </a:xfrm>
-          <a:prstGeom prst="rect">
-            <a:avLst/>
-          </a:prstGeom>
-          <a:noFill/>
-          <a:ln/>
-        </p:spPr>
-        <p:txBody>
-          <a:bodyPr wrap="square" lIns="0" tIns="0" rIns="0" bIns="0" rtlCol="0" anchor="ctr"/>
-          <a:lstStyle/>
-          <a:p>
-            <a:pPr indent="0" marL="0">
-              <a:buNone/>
-            </a:pPr>
-            <a:r>
-              <a:rPr lang="en-US" sz="1600" b="1" dirty="0">
-                <a:solidFill>
-                  <a:srgbClr val="08A6A6"/>
-                </a:solidFill>
-                <a:latin typeface="IBM Plex Sans" pitchFamily="34" charset="0"/>
-                <a:ea typeface="IBM Plex Sans" pitchFamily="34" charset="-122"/>
-                <a:cs typeface="IBM Plex Sans" pitchFamily="34" charset="-120"/>
-              </a:rPr>
-              <a:t>Use brackets</a:t>
-            </a:r>
-            <a:endParaRPr lang="en-US" sz="1600" dirty="0"/>
-          </a:p>
-        </p:txBody>
-      </p:sp>
-      <p:sp>
-        <p:nvSpPr>
-          <p:cNvPr id="18" name="Text 16"/>
-          <p:cNvSpPr txBox="1"/>
-          <p:nvPr/>
-        </p:nvSpPr>
-        <p:spPr>
-          <a:xfrm>
-            <a:off x="6537960" y="4361688"/>
-            <a:ext cx="4754880" cy="1005840"/>
-          </a:xfrm>
-          <a:prstGeom prst="rect">
-            <a:avLst/>
-          </a:prstGeom>
-          <a:noFill/>
-          <a:ln/>
-        </p:spPr>
-        <p:txBody>
-          <a:bodyPr wrap="square" lIns="0" tIns="0" rIns="0" bIns="0" rtlCol="0" anchor="t"/>
-          <a:lstStyle/>
-          <a:p>
-            <a:pPr indent="0" marL="0">
-              <a:lnSpc>
-                <a:spcPct val="120000"/>
-              </a:lnSpc>
-              <a:buNone/>
-            </a:pPr>
-            <a:r>
-              <a:rPr lang="en-US" sz="1300" dirty="0">
-                <a:solidFill>
-                  <a:srgbClr val="667085"/>
-                </a:solidFill>
-                <a:latin typeface="IBM Plex Sans" pitchFamily="34" charset="0"/>
-                <a:ea typeface="IBM Plex Sans" pitchFamily="34" charset="-122"/>
-                <a:cs typeface="IBM Plex Sans" pitchFamily="34" charset="-120"/>
-              </a:rPr>
-              <a:t>WHERE a AND b OR c can mean two different things, and brackets say which one you meant.</a:t>
-            </a:r>
-            <a:endParaRPr lang="en-US" sz="1300" dirty="0"/>
           </a:p>
         </p:txBody>
       </p:sp>
@@ -3952,7 +4530,7 @@
                 <a:ea typeface="IBM Plex Sans" pitchFamily="34" charset="-122"/>
                 <a:cs typeface="IBM Plex Sans" pitchFamily="34" charset="-120"/>
               </a:rPr>
-              <a:t>Exam practice</a:t>
+              <a:t>Worth knowing</a:t>
             </a:r>
             <a:endParaRPr lang="en-US" sz="3200" dirty="0"/>
           </a:p>
@@ -3991,7 +4569,7 @@
                 <a:ea typeface="IBM Plex Sans" pitchFamily="34" charset="-122"/>
                 <a:cs typeface="IBM Plex Sans" pitchFamily="34" charset="-120"/>
               </a:rPr>
-              <a:t>Devices away. Answer from memory on the worksheet.</a:t>
+              <a:t>The information markers dotted around the room</a:t>
             </a:r>
             <a:endParaRPr lang="en-US" sz="1500" dirty="0"/>
           </a:p>
@@ -4006,11 +4584,11 @@
         <p:spPr>
           <a:xfrm>
             <a:off x="502920" y="1828800"/>
-            <a:ext cx="11155680" cy="1097280"/>
+            <a:ext cx="5394960" cy="1737360"/>
           </a:xfrm>
           <a:prstGeom prst="roundRect">
             <a:avLst>
-              <a:gd name="adj" fmla="val 10000"/>
+              <a:gd name="adj" fmla="val 6316"/>
             </a:avLst>
           </a:prstGeom>
           <a:solidFill>
@@ -4018,7 +4596,7 @@
           </a:solidFill>
           <a:ln w="15875">
             <a:solidFill>
-              <a:srgbClr val="D9DEE7"/>
+              <a:srgbClr val="2D63FF"/>
             </a:solidFill>
             <a:prstDash val="solid"/>
           </a:ln>
@@ -4032,489 +4610,93 @@
         </p:nvSpPr>
         <p:spPr>
           <a:xfrm>
-            <a:off x="914400" y="1938528"/>
-            <a:ext cx="9418320" cy="877824"/>
-          </a:xfrm>
-          <a:prstGeom prst="rect">
-            <a:avLst/>
-          </a:prstGeom>
-          <a:noFill/>
-          <a:ln/>
-        </p:spPr>
-        <p:txBody>
-          <a:bodyPr wrap="square" lIns="0" tIns="0" rIns="0" bIns="0" rtlCol="0" anchor="ctr"/>
-          <a:lstStyle/>
-          <a:p>
-            <a:pPr indent="0" marL="0">
-              <a:lnSpc>
-                <a:spcPct val="118000"/>
-              </a:lnSpc>
-              <a:buNone/>
-            </a:pPr>
-            <a:r>
-              <a:rPr lang="en-US" sz="1700" dirty="0">
-                <a:solidFill>
-                  <a:srgbClr val="101828"/>
+            <a:off x="822960" y="2011680"/>
+            <a:ext cx="4754880" cy="365760"/>
+          </a:xfrm>
+          <a:prstGeom prst="rect">
+            <a:avLst/>
+          </a:prstGeom>
+          <a:noFill/>
+          <a:ln/>
+        </p:spPr>
+        <p:txBody>
+          <a:bodyPr wrap="square" lIns="0" tIns="0" rIns="0" bIns="0" rtlCol="0" anchor="ctr"/>
+          <a:lstStyle/>
+          <a:p>
+            <a:pPr indent="0" marL="0">
+              <a:buNone/>
+            </a:pPr>
+            <a:r>
+              <a:rPr lang="en-US" sz="1600" b="1" dirty="0">
+                <a:solidFill>
+                  <a:srgbClr val="2D63FF"/>
                 </a:solidFill>
                 <a:latin typeface="IBM Plex Sans" pitchFamily="34" charset="0"/>
                 <a:ea typeface="IBM Plex Sans" pitchFamily="34" charset="-122"/>
                 <a:cs typeface="IBM Plex Sans" pitchFamily="34" charset="-120"/>
               </a:rPr>
-              <a:t>A query is written </a:t>
-            </a:r>
+              <a:t>Asking, not telling</a:t>
+            </a:r>
+            <a:endParaRPr lang="en-US" sz="1600" dirty="0"/>
+          </a:p>
+        </p:txBody>
+      </p:sp>
+      <p:sp>
+        <p:nvSpPr>
+          <p:cNvPr id="9" name="Text 7"/>
+          <p:cNvSpPr txBox="1"/>
+          <p:nvPr/>
+        </p:nvSpPr>
+        <p:spPr>
+          <a:xfrm>
+            <a:off x="822960" y="2395728"/>
+            <a:ext cx="4754880" cy="1005840"/>
+          </a:xfrm>
+          <a:prstGeom prst="rect">
+            <a:avLst/>
+          </a:prstGeom>
+          <a:noFill/>
+          <a:ln/>
+        </p:spPr>
+        <p:txBody>
+          <a:bodyPr wrap="square" lIns="0" tIns="0" rIns="0" bIns="0" rtlCol="0" anchor="t"/>
+          <a:lstStyle/>
+          <a:p>
             <a:pPr indent="0" marL="0">
               <a:lnSpc>
-                <a:spcPct val="118000"/>
+                <a:spcPct val="120000"/>
               </a:lnSpc>
               <a:buNone/>
             </a:pPr>
             <a:r>
-              <a:rPr lang="en-US" sz="1700" dirty="0">
-                <a:solidFill>
-                  <a:srgbClr val="18181B"/>
-                </a:solidFill>
-                <a:latin typeface="IBM Plex Mono" pitchFamily="34" charset="0"/>
-                <a:ea typeface="IBM Plex Mono" pitchFamily="34" charset="-122"/>
-                <a:cs typeface="IBM Plex Mono" pitchFamily="34" charset="-120"/>
-              </a:rPr>
-              <a:t>SELECT</a:t>
-            </a:r>
-            <a:pPr indent="0" marL="0">
-              <a:lnSpc>
-                <a:spcPct val="118000"/>
-              </a:lnSpc>
-              <a:buNone/>
-            </a:pPr>
-            <a:r>
-              <a:rPr lang="en-US" sz="1700" dirty="0">
-                <a:solidFill>
-                  <a:srgbClr val="18181B"/>
-                </a:solidFill>
-                <a:latin typeface="IBM Plex Mono" pitchFamily="34" charset="0"/>
-                <a:ea typeface="IBM Plex Mono" pitchFamily="34" charset="-122"/>
-                <a:cs typeface="IBM Plex Mono" pitchFamily="34" charset="-120"/>
-              </a:rPr>
-              <a:t> </a:t>
-            </a:r>
-            <a:pPr indent="0" marL="0">
-              <a:lnSpc>
-                <a:spcPct val="118000"/>
-              </a:lnSpc>
-              <a:buNone/>
-            </a:pPr>
-            <a:r>
-              <a:rPr lang="en-US" sz="1700" dirty="0">
-                <a:solidFill>
-                  <a:srgbClr val="18181B"/>
-                </a:solidFill>
-                <a:latin typeface="IBM Plex Mono" pitchFamily="34" charset="0"/>
-                <a:ea typeface="IBM Plex Mono" pitchFamily="34" charset="-122"/>
-                <a:cs typeface="IBM Plex Mono" pitchFamily="34" charset="-120"/>
-              </a:rPr>
-              <a:t>Title</a:t>
-            </a:r>
-            <a:pPr indent="0" marL="0">
-              <a:lnSpc>
-                <a:spcPct val="118000"/>
-              </a:lnSpc>
-              <a:buNone/>
-            </a:pPr>
-            <a:r>
-              <a:rPr lang="en-US" sz="1700" dirty="0">
-                <a:solidFill>
-                  <a:srgbClr val="18181B"/>
-                </a:solidFill>
-                <a:latin typeface="IBM Plex Mono" pitchFamily="34" charset="0"/>
-                <a:ea typeface="IBM Plex Mono" pitchFamily="34" charset="-122"/>
-                <a:cs typeface="IBM Plex Mono" pitchFamily="34" charset="-120"/>
-              </a:rPr>
-              <a:t> </a:t>
-            </a:r>
-            <a:pPr indent="0" marL="0">
-              <a:lnSpc>
-                <a:spcPct val="118000"/>
-              </a:lnSpc>
-              <a:buNone/>
-            </a:pPr>
-            <a:r>
-              <a:rPr lang="en-US" sz="1700" dirty="0">
-                <a:solidFill>
-                  <a:srgbClr val="18181B"/>
-                </a:solidFill>
-                <a:latin typeface="IBM Plex Mono" pitchFamily="34" charset="0"/>
-                <a:ea typeface="IBM Plex Mono" pitchFamily="34" charset="-122"/>
-                <a:cs typeface="IBM Plex Mono" pitchFamily="34" charset="-120"/>
-              </a:rPr>
-              <a:t>FROM</a:t>
-            </a:r>
-            <a:pPr indent="0" marL="0">
-              <a:lnSpc>
-                <a:spcPct val="118000"/>
-              </a:lnSpc>
-              <a:buNone/>
-            </a:pPr>
-            <a:r>
-              <a:rPr lang="en-US" sz="1700" dirty="0">
-                <a:solidFill>
-                  <a:srgbClr val="18181B"/>
-                </a:solidFill>
-                <a:latin typeface="IBM Plex Mono" pitchFamily="34" charset="0"/>
-                <a:ea typeface="IBM Plex Mono" pitchFamily="34" charset="-122"/>
-                <a:cs typeface="IBM Plex Mono" pitchFamily="34" charset="-120"/>
-              </a:rPr>
-              <a:t> </a:t>
-            </a:r>
-            <a:pPr indent="0" marL="0">
-              <a:lnSpc>
-                <a:spcPct val="118000"/>
-              </a:lnSpc>
-              <a:buNone/>
-            </a:pPr>
-            <a:r>
-              <a:rPr lang="en-US" sz="1700" dirty="0">
-                <a:solidFill>
-                  <a:srgbClr val="18181B"/>
-                </a:solidFill>
-                <a:latin typeface="IBM Plex Mono" pitchFamily="34" charset="0"/>
-                <a:ea typeface="IBM Plex Mono" pitchFamily="34" charset="-122"/>
-                <a:cs typeface="IBM Plex Mono" pitchFamily="34" charset="-120"/>
-              </a:rPr>
-              <a:t>Game</a:t>
-            </a:r>
-            <a:pPr indent="0" marL="0">
-              <a:lnSpc>
-                <a:spcPct val="118000"/>
-              </a:lnSpc>
-              <a:buNone/>
-            </a:pPr>
-            <a:r>
-              <a:rPr lang="en-US" sz="1700" dirty="0">
-                <a:solidFill>
-                  <a:srgbClr val="18181B"/>
-                </a:solidFill>
-                <a:latin typeface="IBM Plex Mono" pitchFamily="34" charset="0"/>
-                <a:ea typeface="IBM Plex Mono" pitchFamily="34" charset="-122"/>
-                <a:cs typeface="IBM Plex Mono" pitchFamily="34" charset="-120"/>
-              </a:rPr>
-              <a:t> </a:t>
-            </a:r>
-            <a:pPr indent="0" marL="0">
-              <a:lnSpc>
-                <a:spcPct val="118000"/>
-              </a:lnSpc>
-              <a:buNone/>
-            </a:pPr>
-            <a:r>
-              <a:rPr lang="en-US" sz="1700" dirty="0">
-                <a:solidFill>
-                  <a:srgbClr val="18181B"/>
-                </a:solidFill>
-                <a:latin typeface="IBM Plex Mono" pitchFamily="34" charset="0"/>
-                <a:ea typeface="IBM Plex Mono" pitchFamily="34" charset="-122"/>
-                <a:cs typeface="IBM Plex Mono" pitchFamily="34" charset="-120"/>
-              </a:rPr>
-              <a:t>ORDER</a:t>
-            </a:r>
-            <a:pPr indent="0" marL="0">
-              <a:lnSpc>
-                <a:spcPct val="118000"/>
-              </a:lnSpc>
-              <a:buNone/>
-            </a:pPr>
-            <a:r>
-              <a:rPr lang="en-US" sz="1700" dirty="0">
-                <a:solidFill>
-                  <a:srgbClr val="18181B"/>
-                </a:solidFill>
-                <a:latin typeface="IBM Plex Mono" pitchFamily="34" charset="0"/>
-                <a:ea typeface="IBM Plex Mono" pitchFamily="34" charset="-122"/>
-                <a:cs typeface="IBM Plex Mono" pitchFamily="34" charset="-120"/>
-              </a:rPr>
-              <a:t> </a:t>
-            </a:r>
-            <a:pPr indent="0" marL="0">
-              <a:lnSpc>
-                <a:spcPct val="118000"/>
-              </a:lnSpc>
-              <a:buNone/>
-            </a:pPr>
-            <a:r>
-              <a:rPr lang="en-US" sz="1700" dirty="0">
-                <a:solidFill>
-                  <a:srgbClr val="18181B"/>
-                </a:solidFill>
-                <a:latin typeface="IBM Plex Mono" pitchFamily="34" charset="0"/>
-                <a:ea typeface="IBM Plex Mono" pitchFamily="34" charset="-122"/>
-                <a:cs typeface="IBM Plex Mono" pitchFamily="34" charset="-120"/>
-              </a:rPr>
-              <a:t>BY</a:t>
-            </a:r>
-            <a:pPr indent="0" marL="0">
-              <a:lnSpc>
-                <a:spcPct val="118000"/>
-              </a:lnSpc>
-              <a:buNone/>
-            </a:pPr>
-            <a:r>
-              <a:rPr lang="en-US" sz="1700" dirty="0">
-                <a:solidFill>
-                  <a:srgbClr val="18181B"/>
-                </a:solidFill>
-                <a:latin typeface="IBM Plex Mono" pitchFamily="34" charset="0"/>
-                <a:ea typeface="IBM Plex Mono" pitchFamily="34" charset="-122"/>
-                <a:cs typeface="IBM Plex Mono" pitchFamily="34" charset="-120"/>
-              </a:rPr>
-              <a:t> </a:t>
-            </a:r>
-            <a:pPr indent="0" marL="0">
-              <a:lnSpc>
-                <a:spcPct val="118000"/>
-              </a:lnSpc>
-              <a:buNone/>
-            </a:pPr>
-            <a:r>
-              <a:rPr lang="en-US" sz="1700" dirty="0">
-                <a:solidFill>
-                  <a:srgbClr val="18181B"/>
-                </a:solidFill>
-                <a:latin typeface="IBM Plex Mono" pitchFamily="34" charset="0"/>
-                <a:ea typeface="IBM Plex Mono" pitchFamily="34" charset="-122"/>
-                <a:cs typeface="IBM Plex Mono" pitchFamily="34" charset="-120"/>
-              </a:rPr>
-              <a:t>Length</a:t>
-            </a:r>
-            <a:pPr indent="0" marL="0">
-              <a:lnSpc>
-                <a:spcPct val="118000"/>
-              </a:lnSpc>
-              <a:buNone/>
-            </a:pPr>
-            <a:r>
-              <a:rPr lang="en-US" sz="1700" dirty="0">
-                <a:solidFill>
-                  <a:srgbClr val="18181B"/>
-                </a:solidFill>
-                <a:latin typeface="IBM Plex Mono" pitchFamily="34" charset="0"/>
-                <a:ea typeface="IBM Plex Mono" pitchFamily="34" charset="-122"/>
-                <a:cs typeface="IBM Plex Mono" pitchFamily="34" charset="-120"/>
-              </a:rPr>
-              <a:t> </a:t>
-            </a:r>
-            <a:pPr indent="0" marL="0">
-              <a:lnSpc>
-                <a:spcPct val="118000"/>
-              </a:lnSpc>
-              <a:buNone/>
-            </a:pPr>
-            <a:r>
-              <a:rPr lang="en-US" sz="1700" dirty="0">
-                <a:solidFill>
-                  <a:srgbClr val="18181B"/>
-                </a:solidFill>
-                <a:latin typeface="IBM Plex Mono" pitchFamily="34" charset="0"/>
-                <a:ea typeface="IBM Plex Mono" pitchFamily="34" charset="-122"/>
-                <a:cs typeface="IBM Plex Mono" pitchFamily="34" charset="-120"/>
-              </a:rPr>
-              <a:t>WHERE</a:t>
-            </a:r>
-            <a:pPr indent="0" marL="0">
-              <a:lnSpc>
-                <a:spcPct val="118000"/>
-              </a:lnSpc>
-              <a:buNone/>
-            </a:pPr>
-            <a:r>
-              <a:rPr lang="en-US" sz="1700" dirty="0">
-                <a:solidFill>
-                  <a:srgbClr val="18181B"/>
-                </a:solidFill>
-                <a:latin typeface="IBM Plex Mono" pitchFamily="34" charset="0"/>
-                <a:ea typeface="IBM Plex Mono" pitchFamily="34" charset="-122"/>
-                <a:cs typeface="IBM Plex Mono" pitchFamily="34" charset="-120"/>
-              </a:rPr>
-              <a:t> </a:t>
-            </a:r>
-            <a:pPr indent="0" marL="0">
-              <a:lnSpc>
-                <a:spcPct val="118000"/>
-              </a:lnSpc>
-              <a:buNone/>
-            </a:pPr>
-            <a:r>
-              <a:rPr lang="en-US" sz="1700" dirty="0">
-                <a:solidFill>
-                  <a:srgbClr val="18181B"/>
-                </a:solidFill>
-                <a:latin typeface="IBM Plex Mono" pitchFamily="34" charset="0"/>
-                <a:ea typeface="IBM Plex Mono" pitchFamily="34" charset="-122"/>
-                <a:cs typeface="IBM Plex Mono" pitchFamily="34" charset="-120"/>
-              </a:rPr>
-              <a:t>Players</a:t>
-            </a:r>
-            <a:pPr indent="0" marL="0">
-              <a:lnSpc>
-                <a:spcPct val="118000"/>
-              </a:lnSpc>
-              <a:buNone/>
-            </a:pPr>
-            <a:r>
-              <a:rPr lang="en-US" sz="1700" dirty="0">
-                <a:solidFill>
-                  <a:srgbClr val="18181B"/>
-                </a:solidFill>
-                <a:latin typeface="IBM Plex Mono" pitchFamily="34" charset="0"/>
-                <a:ea typeface="IBM Plex Mono" pitchFamily="34" charset="-122"/>
-                <a:cs typeface="IBM Plex Mono" pitchFamily="34" charset="-120"/>
-              </a:rPr>
-              <a:t> </a:t>
-            </a:r>
-            <a:pPr indent="0" marL="0">
-              <a:lnSpc>
-                <a:spcPct val="118000"/>
-              </a:lnSpc>
-              <a:buNone/>
-            </a:pPr>
-            <a:r>
-              <a:rPr lang="en-US" sz="1700" dirty="0">
-                <a:solidFill>
-                  <a:srgbClr val="3F3F46"/>
-                </a:solidFill>
-                <a:latin typeface="IBM Plex Mono" pitchFamily="34" charset="0"/>
-                <a:ea typeface="IBM Plex Mono" pitchFamily="34" charset="-122"/>
-                <a:cs typeface="IBM Plex Mono" pitchFamily="34" charset="-120"/>
-              </a:rPr>
-              <a:t>=</a:t>
-            </a:r>
-            <a:pPr indent="0" marL="0">
-              <a:lnSpc>
-                <a:spcPct val="118000"/>
-              </a:lnSpc>
-              <a:buNone/>
-            </a:pPr>
-            <a:r>
-              <a:rPr lang="en-US" sz="1700" dirty="0">
-                <a:solidFill>
-                  <a:srgbClr val="18181B"/>
-                </a:solidFill>
-                <a:latin typeface="IBM Plex Mono" pitchFamily="34" charset="0"/>
-                <a:ea typeface="IBM Plex Mono" pitchFamily="34" charset="-122"/>
-                <a:cs typeface="IBM Plex Mono" pitchFamily="34" charset="-120"/>
-              </a:rPr>
-              <a:t> </a:t>
-            </a:r>
-            <a:pPr indent="0" marL="0">
-              <a:lnSpc>
-                <a:spcPct val="118000"/>
-              </a:lnSpc>
-              <a:buNone/>
-            </a:pPr>
-            <a:r>
-              <a:rPr lang="en-US" sz="1700" dirty="0">
-                <a:solidFill>
-                  <a:srgbClr val="9A3412"/>
-                </a:solidFill>
-                <a:latin typeface="IBM Plex Mono" pitchFamily="34" charset="0"/>
-                <a:ea typeface="IBM Plex Mono" pitchFamily="34" charset="-122"/>
-                <a:cs typeface="IBM Plex Mono" pitchFamily="34" charset="-120"/>
-              </a:rPr>
-              <a:t>2</a:t>
-            </a:r>
-            <a:pPr indent="0" marL="0">
-              <a:lnSpc>
-                <a:spcPct val="118000"/>
-              </a:lnSpc>
-              <a:buNone/>
-            </a:pPr>
-            <a:r>
-              <a:rPr lang="en-US" sz="1700" dirty="0">
-                <a:solidFill>
-                  <a:srgbClr val="101828"/>
+              <a:rPr lang="en-US" sz="1300" dirty="0">
+                <a:solidFill>
+                  <a:srgbClr val="667085"/>
                 </a:solidFill>
                 <a:latin typeface="IBM Plex Sans" pitchFamily="34" charset="0"/>
                 <a:ea typeface="IBM Plex Sans" pitchFamily="34" charset="-122"/>
                 <a:cs typeface="IBM Plex Sans" pitchFamily="34" charset="-120"/>
               </a:rPr>
-              <a:t>. State the error in it, and write the query out corrected.</a:t>
-            </a:r>
-            <a:endParaRPr lang="en-US" sz="1700" dirty="0"/>
-          </a:p>
-        </p:txBody>
-      </p:sp>
-      <p:sp>
-        <p:nvSpPr>
-          <p:cNvPr id="9" name="Shape 7"/>
+              <a:t>SQL says what you want, not how to get it. The database works the steps out for itself.</a:t>
+            </a:r>
+            <a:endParaRPr lang="en-US" sz="1300" dirty="0"/>
+          </a:p>
+        </p:txBody>
+      </p:sp>
+      <p:sp>
+        <p:nvSpPr>
+          <p:cNvPr id="10" name="Shape 8"/>
           <p:cNvSpPr/>
           <p:nvPr/>
         </p:nvSpPr>
         <p:spPr>
           <a:xfrm>
-            <a:off x="10515600" y="2130552"/>
-            <a:ext cx="868680" cy="493776"/>
+            <a:off x="6217920" y="1828800"/>
+            <a:ext cx="5394960" cy="1737360"/>
           </a:xfrm>
           <a:prstGeom prst="roundRect">
             <a:avLst>
-              <a:gd name="adj" fmla="val 18519"/>
-            </a:avLst>
-          </a:prstGeom>
-          <a:solidFill>
-            <a:srgbClr val="EEF2FB"/>
-          </a:solidFill>
-          <a:ln/>
-        </p:spPr>
-      </p:sp>
-      <p:sp>
-        <p:nvSpPr>
-          <p:cNvPr id="10" name="Text 8"/>
-          <p:cNvSpPr txBox="1"/>
-          <p:nvPr/>
-        </p:nvSpPr>
-        <p:spPr>
-          <a:xfrm>
-            <a:off x="10515600" y="2130552"/>
-            <a:ext cx="868680" cy="493776"/>
-          </a:xfrm>
-          <a:prstGeom prst="rect">
-            <a:avLst/>
-          </a:prstGeom>
-          <a:noFill/>
-          <a:ln/>
-        </p:spPr>
-        <p:txBody>
-          <a:bodyPr wrap="square" lIns="0" tIns="0" rIns="0" bIns="0" rtlCol="0" anchor="ctr"/>
-          <a:lstStyle/>
-          <a:p>
-            <a:pPr algn="ctr" indent="0" marL="0">
-              <a:buNone/>
-            </a:pPr>
-            <a:r>
-              <a:rPr lang="en-US" sz="1500" b="1" dirty="0">
-                <a:solidFill>
-                  <a:srgbClr val="2D63FF"/>
-                </a:solidFill>
-                <a:latin typeface="IBM Plex Mono" pitchFamily="34" charset="0"/>
-                <a:ea typeface="IBM Plex Mono" pitchFamily="34" charset="-122"/>
-                <a:cs typeface="IBM Plex Mono" pitchFamily="34" charset="-120"/>
-              </a:rPr>
-              <a:t>[2]</a:t>
-            </a:r>
-            <a:endParaRPr lang="en-US" sz="1500" dirty="0"/>
-          </a:p>
-        </p:txBody>
-      </p:sp>
-      <p:sp>
-        <p:nvSpPr>
-          <p:cNvPr id="11" name="Shape 9"/>
-          <p:cNvSpPr/>
-          <p:nvPr/>
-        </p:nvSpPr>
-        <p:spPr>
-          <a:xfrm>
-            <a:off x="502920" y="3127248"/>
-            <a:ext cx="11155680" cy="1097280"/>
-          </a:xfrm>
-          <a:prstGeom prst="roundRect">
-            <a:avLst>
-              <a:gd name="adj" fmla="val 10000"/>
+              <a:gd name="adj" fmla="val 6316"/>
             </a:avLst>
           </a:prstGeom>
           <a:solidFill>
@@ -4522,7 +4704,7 @@
           </a:solidFill>
           <a:ln w="15875">
             <a:solidFill>
-              <a:srgbClr val="D9DEE7"/>
+              <a:srgbClr val="08A6A6"/>
             </a:solidFill>
             <a:prstDash val="solid"/>
           </a:ln>
@@ -4530,43 +4712,82 @@
       </p:sp>
       <p:sp>
         <p:nvSpPr>
-          <p:cNvPr id="12" name="Text 10"/>
-          <p:cNvSpPr txBox="1"/>
-          <p:nvPr/>
-        </p:nvSpPr>
-        <p:spPr>
-          <a:xfrm>
-            <a:off x="914400" y="3236976"/>
-            <a:ext cx="9418320" cy="877824"/>
-          </a:xfrm>
-          <a:prstGeom prst="rect">
-            <a:avLst/>
-          </a:prstGeom>
-          <a:noFill/>
-          <a:ln/>
-        </p:spPr>
-        <p:txBody>
-          <a:bodyPr wrap="square" lIns="0" tIns="0" rIns="0" bIns="0" rtlCol="0" anchor="ctr"/>
-          <a:lstStyle/>
-          <a:p>
-            <a:pPr indent="0" marL="0">
-              <a:lnSpc>
-                <a:spcPct val="118000"/>
-              </a:lnSpc>
-              <a:buNone/>
-            </a:pPr>
-            <a:r>
-              <a:rPr lang="en-US" sz="1700" dirty="0">
-                <a:solidFill>
-                  <a:srgbClr val="101828"/>
+          <p:cNvPr id="11" name="Text 9"/>
+          <p:cNvSpPr txBox="1"/>
+          <p:nvPr/>
+        </p:nvSpPr>
+        <p:spPr>
+          <a:xfrm>
+            <a:off x="6537960" y="2011680"/>
+            <a:ext cx="4754880" cy="365760"/>
+          </a:xfrm>
+          <a:prstGeom prst="rect">
+            <a:avLst/>
+          </a:prstGeom>
+          <a:noFill/>
+          <a:ln/>
+        </p:spPr>
+        <p:txBody>
+          <a:bodyPr wrap="square" lIns="0" tIns="0" rIns="0" bIns="0" rtlCol="0" anchor="ctr"/>
+          <a:lstStyle/>
+          <a:p>
+            <a:pPr indent="0" marL="0">
+              <a:buNone/>
+            </a:pPr>
+            <a:r>
+              <a:rPr lang="en-US" sz="1600" b="1" dirty="0">
+                <a:solidFill>
+                  <a:srgbClr val="08A6A6"/>
                 </a:solidFill>
                 <a:latin typeface="IBM Plex Sans" pitchFamily="34" charset="0"/>
                 <a:ea typeface="IBM Plex Sans" pitchFamily="34" charset="-122"/>
                 <a:cs typeface="IBM Plex Sans" pitchFamily="34" charset="-120"/>
               </a:rPr>
-              <a:t>A table called Track holds the fields Title, Artist, Seconds and Genre. Write a query that lists the title and artist of every track longer than 240 seconds, longest first.</a:t>
-            </a:r>
-            <a:endParaRPr lang="en-US" sz="1700" dirty="0"/>
+              <a:t>Quotes matter</a:t>
+            </a:r>
+            <a:endParaRPr lang="en-US" sz="1600" dirty="0"/>
+          </a:p>
+        </p:txBody>
+      </p:sp>
+      <p:sp>
+        <p:nvSpPr>
+          <p:cNvPr id="12" name="Text 10"/>
+          <p:cNvSpPr txBox="1"/>
+          <p:nvPr/>
+        </p:nvSpPr>
+        <p:spPr>
+          <a:xfrm>
+            <a:off x="6537960" y="2395728"/>
+            <a:ext cx="4754880" cy="1005840"/>
+          </a:xfrm>
+          <a:prstGeom prst="rect">
+            <a:avLst/>
+          </a:prstGeom>
+          <a:noFill/>
+          <a:ln/>
+        </p:spPr>
+        <p:txBody>
+          <a:bodyPr wrap="square" lIns="0" tIns="0" rIns="0" bIns="0" rtlCol="0" anchor="t"/>
+          <a:lstStyle/>
+          <a:p>
+            <a:pPr indent="0" marL="0">
+              <a:lnSpc>
+                <a:spcPct val="120000"/>
+              </a:lnSpc>
+              <a:buNone/>
+            </a:pPr>
+            <a:r>
+              <a:rPr lang="en-US" sz="1300" dirty="0">
+                <a:solidFill>
+                  <a:srgbClr val="667085"/>
+                </a:solidFill>
+                <a:latin typeface="IBM Plex Sans" pitchFamily="34" charset="0"/>
+                <a:ea typeface="IBM Plex Sans" pitchFamily="34" charset="-122"/>
+                <a:cs typeface="IBM Plex Sans" pitchFamily="34" charset="-120"/>
+              </a:rPr>
+              <a:t>WHERE kind = card looks for a field called card and fails. WHERE kind = 'card' looks for the word.</a:t>
+            </a:r>
+            <a:endParaRPr lang="en-US" sz="1300" dirty="0"/>
           </a:p>
         </p:txBody>
       </p:sp>
@@ -4578,73 +4799,12 @@
         </p:nvSpPr>
         <p:spPr>
           <a:xfrm>
-            <a:off x="10515600" y="3429000"/>
-            <a:ext cx="868680" cy="493776"/>
+            <a:off x="502920" y="3794760"/>
+            <a:ext cx="5394960" cy="1737360"/>
           </a:xfrm>
           <a:prstGeom prst="roundRect">
             <a:avLst>
-              <a:gd name="adj" fmla="val 18519"/>
-            </a:avLst>
-          </a:prstGeom>
-          <a:solidFill>
-            <a:srgbClr val="EEF2FB"/>
-          </a:solidFill>
-          <a:ln/>
-        </p:spPr>
-      </p:sp>
-      <p:sp>
-        <p:nvSpPr>
-          <p:cNvPr id="14" name="Text 12"/>
-          <p:cNvSpPr txBox="1"/>
-          <p:nvPr/>
-        </p:nvSpPr>
-        <p:spPr>
-          <a:xfrm>
-            <a:off x="10515600" y="3429000"/>
-            <a:ext cx="868680" cy="493776"/>
-          </a:xfrm>
-          <a:prstGeom prst="rect">
-            <a:avLst/>
-          </a:prstGeom>
-          <a:noFill/>
-          <a:ln/>
-        </p:spPr>
-        <p:txBody>
-          <a:bodyPr wrap="square" lIns="0" tIns="0" rIns="0" bIns="0" rtlCol="0" anchor="ctr"/>
-          <a:lstStyle/>
-          <a:p>
-            <a:pPr algn="ctr" indent="0" marL="0">
-              <a:buNone/>
-            </a:pPr>
-            <a:r>
-              <a:rPr lang="en-US" sz="1500" b="1" dirty="0">
-                <a:solidFill>
-                  <a:srgbClr val="2D63FF"/>
-                </a:solidFill>
-                <a:latin typeface="IBM Plex Mono" pitchFamily="34" charset="0"/>
-                <a:ea typeface="IBM Plex Mono" pitchFamily="34" charset="-122"/>
-                <a:cs typeface="IBM Plex Mono" pitchFamily="34" charset="-120"/>
-              </a:rPr>
-              <a:t>[4]</a:t>
-            </a:r>
-            <a:endParaRPr lang="en-US" sz="1500" dirty="0"/>
-          </a:p>
-        </p:txBody>
-      </p:sp>
-      <p:sp>
-        <p:nvSpPr>
-          <p:cNvPr id="15" name="Shape 13"/>
-          <p:cNvSpPr/>
-          <p:nvPr/>
-        </p:nvSpPr>
-        <p:spPr>
-          <a:xfrm>
-            <a:off x="502920" y="4425696"/>
-            <a:ext cx="11155680" cy="1097280"/>
-          </a:xfrm>
-          <a:prstGeom prst="roundRect">
-            <a:avLst>
-              <a:gd name="adj" fmla="val 10000"/>
+              <a:gd name="adj" fmla="val 6316"/>
             </a:avLst>
           </a:prstGeom>
           <a:solidFill>
@@ -4652,7 +4812,7 @@
           </a:solidFill>
           <a:ln w="15875">
             <a:solidFill>
-              <a:srgbClr val="D9DEE7"/>
+              <a:srgbClr val="2D63FF"/>
             </a:solidFill>
             <a:prstDash val="solid"/>
           </a:ln>
@@ -4660,67 +4820,150 @@
       </p:sp>
       <p:sp>
         <p:nvSpPr>
-          <p:cNvPr id="16" name="Text 14"/>
-          <p:cNvSpPr txBox="1"/>
-          <p:nvPr/>
-        </p:nvSpPr>
-        <p:spPr>
-          <a:xfrm>
-            <a:off x="914400" y="4535424"/>
-            <a:ext cx="9418320" cy="877824"/>
-          </a:xfrm>
-          <a:prstGeom prst="rect">
-            <a:avLst/>
-          </a:prstGeom>
-          <a:noFill/>
-          <a:ln/>
-        </p:spPr>
-        <p:txBody>
-          <a:bodyPr wrap="square" lIns="0" tIns="0" rIns="0" bIns="0" rtlCol="0" anchor="ctr"/>
-          <a:lstStyle/>
-          <a:p>
-            <a:pPr indent="0" marL="0">
-              <a:lnSpc>
-                <a:spcPct val="118000"/>
-              </a:lnSpc>
-              <a:buNone/>
-            </a:pPr>
-            <a:r>
-              <a:rPr lang="en-US" sz="1700" dirty="0">
-                <a:solidFill>
-                  <a:srgbClr val="101828"/>
+          <p:cNvPr id="14" name="Text 12"/>
+          <p:cNvSpPr txBox="1"/>
+          <p:nvPr/>
+        </p:nvSpPr>
+        <p:spPr>
+          <a:xfrm>
+            <a:off x="822960" y="3977640"/>
+            <a:ext cx="4754880" cy="365760"/>
+          </a:xfrm>
+          <a:prstGeom prst="rect">
+            <a:avLst/>
+          </a:prstGeom>
+          <a:noFill/>
+          <a:ln/>
+        </p:spPr>
+        <p:txBody>
+          <a:bodyPr wrap="square" lIns="0" tIns="0" rIns="0" bIns="0" rtlCol="0" anchor="ctr"/>
+          <a:lstStyle/>
+          <a:p>
+            <a:pPr indent="0" marL="0">
+              <a:buNone/>
+            </a:pPr>
+            <a:r>
+              <a:rPr lang="en-US" sz="1600" b="1" dirty="0">
+                <a:solidFill>
+                  <a:srgbClr val="2D63FF"/>
                 </a:solidFill>
                 <a:latin typeface="IBM Plex Sans" pitchFamily="34" charset="0"/>
                 <a:ea typeface="IBM Plex Sans" pitchFamily="34" charset="-122"/>
                 <a:cs typeface="IBM Plex Sans" pitchFamily="34" charset="-120"/>
               </a:rPr>
-              <a:t>Using the same Track table, write a query that lists the title of every track that is Jazz or Blues and lasts under 180 seconds.</a:t>
-            </a:r>
-            <a:endParaRPr lang="en-US" sz="1700" dirty="0"/>
-          </a:p>
-        </p:txBody>
-      </p:sp>
-      <p:sp>
-        <p:nvSpPr>
-          <p:cNvPr id="17" name="Shape 15"/>
+              <a:t>Boundaries again</a:t>
+            </a:r>
+            <a:endParaRPr lang="en-US" sz="1600" dirty="0"/>
+          </a:p>
+        </p:txBody>
+      </p:sp>
+      <p:sp>
+        <p:nvSpPr>
+          <p:cNvPr id="15" name="Text 13"/>
+          <p:cNvSpPr txBox="1"/>
+          <p:nvPr/>
+        </p:nvSpPr>
+        <p:spPr>
+          <a:xfrm>
+            <a:off x="822960" y="4361688"/>
+            <a:ext cx="4754880" cy="1005840"/>
+          </a:xfrm>
+          <a:prstGeom prst="rect">
+            <a:avLst/>
+          </a:prstGeom>
+          <a:noFill/>
+          <a:ln/>
+        </p:spPr>
+        <p:txBody>
+          <a:bodyPr wrap="square" lIns="0" tIns="0" rIns="0" bIns="0" rtlCol="0" anchor="t"/>
+          <a:lstStyle/>
+          <a:p>
+            <a:pPr indent="0" marL="0">
+              <a:lnSpc>
+                <a:spcPct val="120000"/>
+              </a:lnSpc>
+              <a:buNone/>
+            </a:pPr>
+            <a:r>
+              <a:rPr lang="en-US" sz="1300" dirty="0">
+                <a:solidFill>
+                  <a:srgbClr val="667085"/>
+                </a:solidFill>
+                <a:latin typeface="IBM Plex Sans" pitchFamily="34" charset="0"/>
+                <a:ea typeface="IBM Plex Sans" pitchFamily="34" charset="-122"/>
+                <a:cs typeface="IBM Plex Sans" pitchFamily="34" charset="-120"/>
+              </a:rPr>
+              <a:t>'Over 60' and '60 or more' are different queries. The off-by-one that bites in Python bites here too.</a:t>
+            </a:r>
+            <a:endParaRPr lang="en-US" sz="1300" dirty="0"/>
+          </a:p>
+        </p:txBody>
+      </p:sp>
+      <p:sp>
+        <p:nvSpPr>
+          <p:cNvPr id="16" name="Shape 14"/>
           <p:cNvSpPr/>
           <p:nvPr/>
         </p:nvSpPr>
         <p:spPr>
           <a:xfrm>
-            <a:off x="10515600" y="4727448"/>
-            <a:ext cx="868680" cy="493776"/>
+            <a:off x="6217920" y="3794760"/>
+            <a:ext cx="5394960" cy="1737360"/>
           </a:xfrm>
           <a:prstGeom prst="roundRect">
             <a:avLst>
-              <a:gd name="adj" fmla="val 18519"/>
+              <a:gd name="adj" fmla="val 6316"/>
             </a:avLst>
           </a:prstGeom>
           <a:solidFill>
-            <a:srgbClr val="EEF2FB"/>
+            <a:srgbClr val="FFFFFF"/>
           </a:solidFill>
-          <a:ln/>
-        </p:spPr>
+          <a:ln w="15875">
+            <a:solidFill>
+              <a:srgbClr val="08A6A6"/>
+            </a:solidFill>
+            <a:prstDash val="solid"/>
+          </a:ln>
+        </p:spPr>
+      </p:sp>
+      <p:sp>
+        <p:nvSpPr>
+          <p:cNvPr id="17" name="Text 15"/>
+          <p:cNvSpPr txBox="1"/>
+          <p:nvPr/>
+        </p:nvSpPr>
+        <p:spPr>
+          <a:xfrm>
+            <a:off x="6537960" y="3977640"/>
+            <a:ext cx="4754880" cy="365760"/>
+          </a:xfrm>
+          <a:prstGeom prst="rect">
+            <a:avLst/>
+          </a:prstGeom>
+          <a:noFill/>
+          <a:ln/>
+        </p:spPr>
+        <p:txBody>
+          <a:bodyPr wrap="square" lIns="0" tIns="0" rIns="0" bIns="0" rtlCol="0" anchor="ctr"/>
+          <a:lstStyle/>
+          <a:p>
+            <a:pPr indent="0" marL="0">
+              <a:buNone/>
+            </a:pPr>
+            <a:r>
+              <a:rPr lang="en-US" sz="1600" b="1" dirty="0">
+                <a:solidFill>
+                  <a:srgbClr val="08A6A6"/>
+                </a:solidFill>
+                <a:latin typeface="IBM Plex Sans" pitchFamily="34" charset="0"/>
+                <a:ea typeface="IBM Plex Sans" pitchFamily="34" charset="-122"/>
+                <a:cs typeface="IBM Plex Sans" pitchFamily="34" charset="-120"/>
+              </a:rPr>
+              <a:t>Use brackets</a:t>
+            </a:r>
+            <a:endParaRPr lang="en-US" sz="1600" dirty="0"/>
+          </a:p>
+        </p:txBody>
       </p:sp>
       <p:sp>
         <p:nvSpPr>
@@ -4730,34 +4973,37 @@
         </p:nvSpPr>
         <p:spPr>
           <a:xfrm>
-            <a:off x="10515600" y="4727448"/>
-            <a:ext cx="868680" cy="493776"/>
-          </a:xfrm>
-          <a:prstGeom prst="rect">
-            <a:avLst/>
-          </a:prstGeom>
-          <a:noFill/>
-          <a:ln/>
-        </p:spPr>
-        <p:txBody>
-          <a:bodyPr wrap="square" lIns="0" tIns="0" rIns="0" bIns="0" rtlCol="0" anchor="ctr"/>
-          <a:lstStyle/>
-          <a:p>
-            <a:pPr algn="ctr" indent="0" marL="0">
-              <a:buNone/>
-            </a:pPr>
-            <a:r>
-              <a:rPr lang="en-US" sz="1500" b="1" dirty="0">
-                <a:solidFill>
-                  <a:srgbClr val="2D63FF"/>
-                </a:solidFill>
-                <a:latin typeface="IBM Plex Mono" pitchFamily="34" charset="0"/>
-                <a:ea typeface="IBM Plex Mono" pitchFamily="34" charset="-122"/>
-                <a:cs typeface="IBM Plex Mono" pitchFamily="34" charset="-120"/>
-              </a:rPr>
-              <a:t>[4]</a:t>
-            </a:r>
-            <a:endParaRPr lang="en-US" sz="1500" dirty="0"/>
+            <a:off x="6537960" y="4361688"/>
+            <a:ext cx="4754880" cy="1005840"/>
+          </a:xfrm>
+          <a:prstGeom prst="rect">
+            <a:avLst/>
+          </a:prstGeom>
+          <a:noFill/>
+          <a:ln/>
+        </p:spPr>
+        <p:txBody>
+          <a:bodyPr wrap="square" lIns="0" tIns="0" rIns="0" bIns="0" rtlCol="0" anchor="t"/>
+          <a:lstStyle/>
+          <a:p>
+            <a:pPr indent="0" marL="0">
+              <a:lnSpc>
+                <a:spcPct val="120000"/>
+              </a:lnSpc>
+              <a:buNone/>
+            </a:pPr>
+            <a:r>
+              <a:rPr lang="en-US" sz="1300" dirty="0">
+                <a:solidFill>
+                  <a:srgbClr val="667085"/>
+                </a:solidFill>
+                <a:latin typeface="IBM Plex Sans" pitchFamily="34" charset="0"/>
+                <a:ea typeface="IBM Plex Sans" pitchFamily="34" charset="-122"/>
+                <a:cs typeface="IBM Plex Sans" pitchFamily="34" charset="-120"/>
+              </a:rPr>
+              <a:t>WHERE a AND b OR c can mean two different things, and brackets say which one you meant.</a:t>
+            </a:r>
+            <a:endParaRPr lang="en-US" sz="1300" dirty="0"/>
           </a:p>
         </p:txBody>
       </p:sp>
@@ -4772,6 +5018,978 @@
 <file path=ppt/slides/slide14.xml><?xml version="1.0" encoding="utf-8"?>
 <p:sld xmlns:a="http://schemas.openxmlformats.org/drawingml/2006/main" xmlns:r="http://schemas.openxmlformats.org/officeDocument/2006/relationships" xmlns:p="http://schemas.openxmlformats.org/presentationml/2006/main">
   <p:cSld name="Slide 14">
+    <p:bg>
+      <p:bgPr>
+        <a:solidFill>
+          <a:srgbClr val="F7F7F4"/>
+        </a:solidFill>
+      </p:bgPr>
+    </p:bg>
+    <p:spTree>
+      <p:nvGrpSpPr>
+        <p:cNvPr id="1" name=""/>
+        <p:cNvGrpSpPr/>
+        <p:nvPr/>
+      </p:nvGrpSpPr>
+      <p:grpSpPr>
+        <a:xfrm>
+          <a:off x="0" y="0"/>
+          <a:ext cx="0" cy="0"/>
+          <a:chOff x="0" y="0"/>
+          <a:chExt cx="0" cy="0"/>
+        </a:xfrm>
+      </p:grpSpPr>
+      <p:sp>
+        <p:nvSpPr>
+          <p:cNvPr id="2" name="Shape 0"/>
+          <p:cNvSpPr/>
+          <p:nvPr/>
+        </p:nvSpPr>
+        <p:spPr>
+          <a:xfrm>
+            <a:off x="0" y="0"/>
+            <a:ext cx="12188952" cy="82296"/>
+          </a:xfrm>
+          <a:prstGeom prst="rect">
+            <a:avLst/>
+          </a:prstGeom>
+          <a:solidFill>
+            <a:srgbClr val="2D63FF"/>
+          </a:solidFill>
+          <a:ln/>
+        </p:spPr>
+      </p:sp>
+      <p:sp>
+        <p:nvSpPr>
+          <p:cNvPr id="3" name="Text 1"/>
+          <p:cNvSpPr txBox="1"/>
+          <p:nvPr/>
+        </p:nvSpPr>
+        <p:spPr>
+          <a:xfrm>
+            <a:off x="502920" y="6236208"/>
+            <a:ext cx="7772400" cy="365760"/>
+          </a:xfrm>
+          <a:prstGeom prst="rect">
+            <a:avLst/>
+          </a:prstGeom>
+          <a:noFill/>
+          <a:ln/>
+        </p:spPr>
+        <p:txBody>
+          <a:bodyPr wrap="square" lIns="0" tIns="0" rIns="0" bIns="0" rtlCol="0" anchor="ctr"/>
+          <a:lstStyle/>
+          <a:p>
+            <a:pPr indent="0" marL="0">
+              <a:buNone/>
+            </a:pPr>
+            <a:r>
+              <a:rPr lang="en-US" sz="1100" dirty="0">
+                <a:solidFill>
+                  <a:srgbClr val="667085"/>
+                </a:solidFill>
+                <a:latin typeface="IBM Plex Mono" pitchFamily="34" charset="0"/>
+                <a:ea typeface="IBM Plex Mono" pitchFamily="34" charset="-122"/>
+                <a:cs typeface="IBM Plex Mono" pitchFamily="34" charset="-120"/>
+              </a:rPr>
+              <a:t>Python programming  |  Lesson 13</a:t>
+            </a:r>
+            <a:endParaRPr lang="en-US" sz="1100" dirty="0"/>
+          </a:p>
+        </p:txBody>
+      </p:sp>
+      <p:sp>
+        <p:nvSpPr>
+          <p:cNvPr id="4" name="Text 2"/>
+          <p:cNvSpPr txBox="1"/>
+          <p:nvPr/>
+        </p:nvSpPr>
+        <p:spPr>
+          <a:xfrm>
+            <a:off x="9326880" y="6236208"/>
+            <a:ext cx="2377440" cy="365760"/>
+          </a:xfrm>
+          <a:prstGeom prst="rect">
+            <a:avLst/>
+          </a:prstGeom>
+          <a:noFill/>
+          <a:ln/>
+        </p:spPr>
+        <p:txBody>
+          <a:bodyPr wrap="square" lIns="0" tIns="0" rIns="0" bIns="0" rtlCol="0" anchor="ctr"/>
+          <a:lstStyle/>
+          <a:p>
+            <a:pPr algn="r" indent="0" marL="0">
+              <a:buNone/>
+            </a:pPr>
+            <a:r>
+              <a:rPr lang="en-US" sz="1100" dirty="0">
+                <a:solidFill>
+                  <a:srgbClr val="667085"/>
+                </a:solidFill>
+                <a:latin typeface="IBM Plex Mono" pitchFamily="34" charset="0"/>
+                <a:ea typeface="IBM Plex Mono" pitchFamily="34" charset="-122"/>
+                <a:cs typeface="IBM Plex Mono" pitchFamily="34" charset="-120"/>
+              </a:rPr>
+              <a:t>Revise 360</a:t>
+            </a:r>
+            <a:endParaRPr lang="en-US" sz="1100" dirty="0"/>
+          </a:p>
+        </p:txBody>
+      </p:sp>
+      <p:sp>
+        <p:nvSpPr>
+          <p:cNvPr id="5" name="Text 3"/>
+          <p:cNvSpPr txBox="1"/>
+          <p:nvPr/>
+        </p:nvSpPr>
+        <p:spPr>
+          <a:xfrm>
+            <a:off x="502920" y="411480"/>
+            <a:ext cx="11155680" cy="777240"/>
+          </a:xfrm>
+          <a:prstGeom prst="rect">
+            <a:avLst/>
+          </a:prstGeom>
+          <a:noFill/>
+          <a:ln/>
+        </p:spPr>
+        <p:txBody>
+          <a:bodyPr wrap="square" lIns="0" tIns="0" rIns="0" bIns="0" rtlCol="0" anchor="ctr"/>
+          <a:lstStyle/>
+          <a:p>
+            <a:pPr indent="0" marL="0">
+              <a:buNone/>
+            </a:pPr>
+            <a:r>
+              <a:rPr lang="en-US" sz="3200" b="1" dirty="0">
+                <a:solidFill>
+                  <a:srgbClr val="101828"/>
+                </a:solidFill>
+                <a:latin typeface="IBM Plex Sans" pitchFamily="34" charset="0"/>
+                <a:ea typeface="IBM Plex Sans" pitchFamily="34" charset="-122"/>
+                <a:cs typeface="IBM Plex Sans" pitchFamily="34" charset="-120"/>
+              </a:rPr>
+              <a:t>Exam practice</a:t>
+            </a:r>
+            <a:endParaRPr lang="en-US" sz="3200" dirty="0"/>
+          </a:p>
+        </p:txBody>
+      </p:sp>
+      <p:sp>
+        <p:nvSpPr>
+          <p:cNvPr id="6" name="Text 4"/>
+          <p:cNvSpPr txBox="1"/>
+          <p:nvPr/>
+        </p:nvSpPr>
+        <p:spPr>
+          <a:xfrm>
+            <a:off x="502920" y="1170432"/>
+            <a:ext cx="11155680" cy="411480"/>
+          </a:xfrm>
+          <a:prstGeom prst="rect">
+            <a:avLst/>
+          </a:prstGeom>
+          <a:noFill/>
+          <a:ln/>
+        </p:spPr>
+        <p:txBody>
+          <a:bodyPr wrap="square" lIns="0" tIns="0" rIns="0" bIns="0" rtlCol="0" anchor="ctr"/>
+          <a:lstStyle/>
+          <a:p>
+            <a:pPr indent="0" marL="0">
+              <a:buNone/>
+            </a:pPr>
+            <a:r>
+              <a:rPr lang="en-US" sz="1500" dirty="0">
+                <a:solidFill>
+                  <a:srgbClr val="667085"/>
+                </a:solidFill>
+                <a:latin typeface="IBM Plex Sans" pitchFamily="34" charset="0"/>
+                <a:ea typeface="IBM Plex Sans" pitchFamily="34" charset="-122"/>
+                <a:cs typeface="IBM Plex Sans" pitchFamily="34" charset="-120"/>
+              </a:rPr>
+              <a:t>Devices away. Answer from memory on the worksheet.</a:t>
+            </a:r>
+            <a:endParaRPr lang="en-US" sz="1500" dirty="0"/>
+          </a:p>
+        </p:txBody>
+      </p:sp>
+      <p:sp>
+        <p:nvSpPr>
+          <p:cNvPr id="7" name="Shape 5"/>
+          <p:cNvSpPr/>
+          <p:nvPr/>
+        </p:nvSpPr>
+        <p:spPr>
+          <a:xfrm>
+            <a:off x="502920" y="1828800"/>
+            <a:ext cx="11155680" cy="1097280"/>
+          </a:xfrm>
+          <a:prstGeom prst="roundRect">
+            <a:avLst>
+              <a:gd name="adj" fmla="val 10000"/>
+            </a:avLst>
+          </a:prstGeom>
+          <a:solidFill>
+            <a:srgbClr val="FFFFFF"/>
+          </a:solidFill>
+          <a:ln w="15875">
+            <a:solidFill>
+              <a:srgbClr val="D9DEE7"/>
+            </a:solidFill>
+            <a:prstDash val="solid"/>
+          </a:ln>
+        </p:spPr>
+      </p:sp>
+      <p:sp>
+        <p:nvSpPr>
+          <p:cNvPr id="8" name="Text 6"/>
+          <p:cNvSpPr txBox="1"/>
+          <p:nvPr/>
+        </p:nvSpPr>
+        <p:spPr>
+          <a:xfrm>
+            <a:off x="914400" y="1938528"/>
+            <a:ext cx="9418320" cy="877824"/>
+          </a:xfrm>
+          <a:prstGeom prst="rect">
+            <a:avLst/>
+          </a:prstGeom>
+          <a:noFill/>
+          <a:ln/>
+        </p:spPr>
+        <p:txBody>
+          <a:bodyPr wrap="square" lIns="0" tIns="0" rIns="0" bIns="0" rtlCol="0" anchor="ctr"/>
+          <a:lstStyle/>
+          <a:p>
+            <a:pPr indent="0" marL="0">
+              <a:lnSpc>
+                <a:spcPct val="118000"/>
+              </a:lnSpc>
+              <a:buNone/>
+            </a:pPr>
+            <a:r>
+              <a:rPr lang="en-US" sz="1700" dirty="0">
+                <a:solidFill>
+                  <a:srgbClr val="101828"/>
+                </a:solidFill>
+                <a:latin typeface="IBM Plex Sans" pitchFamily="34" charset="0"/>
+                <a:ea typeface="IBM Plex Sans" pitchFamily="34" charset="-122"/>
+                <a:cs typeface="IBM Plex Sans" pitchFamily="34" charset="-120"/>
+              </a:rPr>
+              <a:t>A query is written </a:t>
+            </a:r>
+            <a:pPr indent="0" marL="0">
+              <a:lnSpc>
+                <a:spcPct val="118000"/>
+              </a:lnSpc>
+              <a:buNone/>
+            </a:pPr>
+            <a:r>
+              <a:rPr lang="en-US" sz="1700" dirty="0">
+                <a:solidFill>
+                  <a:srgbClr val="18181B"/>
+                </a:solidFill>
+                <a:latin typeface="IBM Plex Mono" pitchFamily="34" charset="0"/>
+                <a:ea typeface="IBM Plex Mono" pitchFamily="34" charset="-122"/>
+                <a:cs typeface="IBM Plex Mono" pitchFamily="34" charset="-120"/>
+              </a:rPr>
+              <a:t>SELECT</a:t>
+            </a:r>
+            <a:pPr indent="0" marL="0">
+              <a:lnSpc>
+                <a:spcPct val="118000"/>
+              </a:lnSpc>
+              <a:buNone/>
+            </a:pPr>
+            <a:r>
+              <a:rPr lang="en-US" sz="1700" dirty="0">
+                <a:solidFill>
+                  <a:srgbClr val="18181B"/>
+                </a:solidFill>
+                <a:latin typeface="IBM Plex Mono" pitchFamily="34" charset="0"/>
+                <a:ea typeface="IBM Plex Mono" pitchFamily="34" charset="-122"/>
+                <a:cs typeface="IBM Plex Mono" pitchFamily="34" charset="-120"/>
+              </a:rPr>
+              <a:t> </a:t>
+            </a:r>
+            <a:pPr indent="0" marL="0">
+              <a:lnSpc>
+                <a:spcPct val="118000"/>
+              </a:lnSpc>
+              <a:buNone/>
+            </a:pPr>
+            <a:r>
+              <a:rPr lang="en-US" sz="1700" dirty="0">
+                <a:solidFill>
+                  <a:srgbClr val="18181B"/>
+                </a:solidFill>
+                <a:latin typeface="IBM Plex Mono" pitchFamily="34" charset="0"/>
+                <a:ea typeface="IBM Plex Mono" pitchFamily="34" charset="-122"/>
+                <a:cs typeface="IBM Plex Mono" pitchFamily="34" charset="-120"/>
+              </a:rPr>
+              <a:t>Title</a:t>
+            </a:r>
+            <a:pPr indent="0" marL="0">
+              <a:lnSpc>
+                <a:spcPct val="118000"/>
+              </a:lnSpc>
+              <a:buNone/>
+            </a:pPr>
+            <a:r>
+              <a:rPr lang="en-US" sz="1700" dirty="0">
+                <a:solidFill>
+                  <a:srgbClr val="18181B"/>
+                </a:solidFill>
+                <a:latin typeface="IBM Plex Mono" pitchFamily="34" charset="0"/>
+                <a:ea typeface="IBM Plex Mono" pitchFamily="34" charset="-122"/>
+                <a:cs typeface="IBM Plex Mono" pitchFamily="34" charset="-120"/>
+              </a:rPr>
+              <a:t> </a:t>
+            </a:r>
+            <a:pPr indent="0" marL="0">
+              <a:lnSpc>
+                <a:spcPct val="118000"/>
+              </a:lnSpc>
+              <a:buNone/>
+            </a:pPr>
+            <a:r>
+              <a:rPr lang="en-US" sz="1700" dirty="0">
+                <a:solidFill>
+                  <a:srgbClr val="18181B"/>
+                </a:solidFill>
+                <a:latin typeface="IBM Plex Mono" pitchFamily="34" charset="0"/>
+                <a:ea typeface="IBM Plex Mono" pitchFamily="34" charset="-122"/>
+                <a:cs typeface="IBM Plex Mono" pitchFamily="34" charset="-120"/>
+              </a:rPr>
+              <a:t>FROM</a:t>
+            </a:r>
+            <a:pPr indent="0" marL="0">
+              <a:lnSpc>
+                <a:spcPct val="118000"/>
+              </a:lnSpc>
+              <a:buNone/>
+            </a:pPr>
+            <a:r>
+              <a:rPr lang="en-US" sz="1700" dirty="0">
+                <a:solidFill>
+                  <a:srgbClr val="18181B"/>
+                </a:solidFill>
+                <a:latin typeface="IBM Plex Mono" pitchFamily="34" charset="0"/>
+                <a:ea typeface="IBM Plex Mono" pitchFamily="34" charset="-122"/>
+                <a:cs typeface="IBM Plex Mono" pitchFamily="34" charset="-120"/>
+              </a:rPr>
+              <a:t> </a:t>
+            </a:r>
+            <a:pPr indent="0" marL="0">
+              <a:lnSpc>
+                <a:spcPct val="118000"/>
+              </a:lnSpc>
+              <a:buNone/>
+            </a:pPr>
+            <a:r>
+              <a:rPr lang="en-US" sz="1700" dirty="0">
+                <a:solidFill>
+                  <a:srgbClr val="18181B"/>
+                </a:solidFill>
+                <a:latin typeface="IBM Plex Mono" pitchFamily="34" charset="0"/>
+                <a:ea typeface="IBM Plex Mono" pitchFamily="34" charset="-122"/>
+                <a:cs typeface="IBM Plex Mono" pitchFamily="34" charset="-120"/>
+              </a:rPr>
+              <a:t>Game</a:t>
+            </a:r>
+            <a:pPr indent="0" marL="0">
+              <a:lnSpc>
+                <a:spcPct val="118000"/>
+              </a:lnSpc>
+              <a:buNone/>
+            </a:pPr>
+            <a:r>
+              <a:rPr lang="en-US" sz="1700" dirty="0">
+                <a:solidFill>
+                  <a:srgbClr val="18181B"/>
+                </a:solidFill>
+                <a:latin typeface="IBM Plex Mono" pitchFamily="34" charset="0"/>
+                <a:ea typeface="IBM Plex Mono" pitchFamily="34" charset="-122"/>
+                <a:cs typeface="IBM Plex Mono" pitchFamily="34" charset="-120"/>
+              </a:rPr>
+              <a:t> </a:t>
+            </a:r>
+            <a:pPr indent="0" marL="0">
+              <a:lnSpc>
+                <a:spcPct val="118000"/>
+              </a:lnSpc>
+              <a:buNone/>
+            </a:pPr>
+            <a:r>
+              <a:rPr lang="en-US" sz="1700" dirty="0">
+                <a:solidFill>
+                  <a:srgbClr val="18181B"/>
+                </a:solidFill>
+                <a:latin typeface="IBM Plex Mono" pitchFamily="34" charset="0"/>
+                <a:ea typeface="IBM Plex Mono" pitchFamily="34" charset="-122"/>
+                <a:cs typeface="IBM Plex Mono" pitchFamily="34" charset="-120"/>
+              </a:rPr>
+              <a:t>ORDER</a:t>
+            </a:r>
+            <a:pPr indent="0" marL="0">
+              <a:lnSpc>
+                <a:spcPct val="118000"/>
+              </a:lnSpc>
+              <a:buNone/>
+            </a:pPr>
+            <a:r>
+              <a:rPr lang="en-US" sz="1700" dirty="0">
+                <a:solidFill>
+                  <a:srgbClr val="18181B"/>
+                </a:solidFill>
+                <a:latin typeface="IBM Plex Mono" pitchFamily="34" charset="0"/>
+                <a:ea typeface="IBM Plex Mono" pitchFamily="34" charset="-122"/>
+                <a:cs typeface="IBM Plex Mono" pitchFamily="34" charset="-120"/>
+              </a:rPr>
+              <a:t> </a:t>
+            </a:r>
+            <a:pPr indent="0" marL="0">
+              <a:lnSpc>
+                <a:spcPct val="118000"/>
+              </a:lnSpc>
+              <a:buNone/>
+            </a:pPr>
+            <a:r>
+              <a:rPr lang="en-US" sz="1700" dirty="0">
+                <a:solidFill>
+                  <a:srgbClr val="18181B"/>
+                </a:solidFill>
+                <a:latin typeface="IBM Plex Mono" pitchFamily="34" charset="0"/>
+                <a:ea typeface="IBM Plex Mono" pitchFamily="34" charset="-122"/>
+                <a:cs typeface="IBM Plex Mono" pitchFamily="34" charset="-120"/>
+              </a:rPr>
+              <a:t>BY</a:t>
+            </a:r>
+            <a:pPr indent="0" marL="0">
+              <a:lnSpc>
+                <a:spcPct val="118000"/>
+              </a:lnSpc>
+              <a:buNone/>
+            </a:pPr>
+            <a:r>
+              <a:rPr lang="en-US" sz="1700" dirty="0">
+                <a:solidFill>
+                  <a:srgbClr val="18181B"/>
+                </a:solidFill>
+                <a:latin typeface="IBM Plex Mono" pitchFamily="34" charset="0"/>
+                <a:ea typeface="IBM Plex Mono" pitchFamily="34" charset="-122"/>
+                <a:cs typeface="IBM Plex Mono" pitchFamily="34" charset="-120"/>
+              </a:rPr>
+              <a:t> </a:t>
+            </a:r>
+            <a:pPr indent="0" marL="0">
+              <a:lnSpc>
+                <a:spcPct val="118000"/>
+              </a:lnSpc>
+              <a:buNone/>
+            </a:pPr>
+            <a:r>
+              <a:rPr lang="en-US" sz="1700" dirty="0">
+                <a:solidFill>
+                  <a:srgbClr val="18181B"/>
+                </a:solidFill>
+                <a:latin typeface="IBM Plex Mono" pitchFamily="34" charset="0"/>
+                <a:ea typeface="IBM Plex Mono" pitchFamily="34" charset="-122"/>
+                <a:cs typeface="IBM Plex Mono" pitchFamily="34" charset="-120"/>
+              </a:rPr>
+              <a:t>Length</a:t>
+            </a:r>
+            <a:pPr indent="0" marL="0">
+              <a:lnSpc>
+                <a:spcPct val="118000"/>
+              </a:lnSpc>
+              <a:buNone/>
+            </a:pPr>
+            <a:r>
+              <a:rPr lang="en-US" sz="1700" dirty="0">
+                <a:solidFill>
+                  <a:srgbClr val="18181B"/>
+                </a:solidFill>
+                <a:latin typeface="IBM Plex Mono" pitchFamily="34" charset="0"/>
+                <a:ea typeface="IBM Plex Mono" pitchFamily="34" charset="-122"/>
+                <a:cs typeface="IBM Plex Mono" pitchFamily="34" charset="-120"/>
+              </a:rPr>
+              <a:t> </a:t>
+            </a:r>
+            <a:pPr indent="0" marL="0">
+              <a:lnSpc>
+                <a:spcPct val="118000"/>
+              </a:lnSpc>
+              <a:buNone/>
+            </a:pPr>
+            <a:r>
+              <a:rPr lang="en-US" sz="1700" dirty="0">
+                <a:solidFill>
+                  <a:srgbClr val="18181B"/>
+                </a:solidFill>
+                <a:latin typeface="IBM Plex Mono" pitchFamily="34" charset="0"/>
+                <a:ea typeface="IBM Plex Mono" pitchFamily="34" charset="-122"/>
+                <a:cs typeface="IBM Plex Mono" pitchFamily="34" charset="-120"/>
+              </a:rPr>
+              <a:t>WHERE</a:t>
+            </a:r>
+            <a:pPr indent="0" marL="0">
+              <a:lnSpc>
+                <a:spcPct val="118000"/>
+              </a:lnSpc>
+              <a:buNone/>
+            </a:pPr>
+            <a:r>
+              <a:rPr lang="en-US" sz="1700" dirty="0">
+                <a:solidFill>
+                  <a:srgbClr val="18181B"/>
+                </a:solidFill>
+                <a:latin typeface="IBM Plex Mono" pitchFamily="34" charset="0"/>
+                <a:ea typeface="IBM Plex Mono" pitchFamily="34" charset="-122"/>
+                <a:cs typeface="IBM Plex Mono" pitchFamily="34" charset="-120"/>
+              </a:rPr>
+              <a:t> </a:t>
+            </a:r>
+            <a:pPr indent="0" marL="0">
+              <a:lnSpc>
+                <a:spcPct val="118000"/>
+              </a:lnSpc>
+              <a:buNone/>
+            </a:pPr>
+            <a:r>
+              <a:rPr lang="en-US" sz="1700" dirty="0">
+                <a:solidFill>
+                  <a:srgbClr val="18181B"/>
+                </a:solidFill>
+                <a:latin typeface="IBM Plex Mono" pitchFamily="34" charset="0"/>
+                <a:ea typeface="IBM Plex Mono" pitchFamily="34" charset="-122"/>
+                <a:cs typeface="IBM Plex Mono" pitchFamily="34" charset="-120"/>
+              </a:rPr>
+              <a:t>Players</a:t>
+            </a:r>
+            <a:pPr indent="0" marL="0">
+              <a:lnSpc>
+                <a:spcPct val="118000"/>
+              </a:lnSpc>
+              <a:buNone/>
+            </a:pPr>
+            <a:r>
+              <a:rPr lang="en-US" sz="1700" dirty="0">
+                <a:solidFill>
+                  <a:srgbClr val="18181B"/>
+                </a:solidFill>
+                <a:latin typeface="IBM Plex Mono" pitchFamily="34" charset="0"/>
+                <a:ea typeface="IBM Plex Mono" pitchFamily="34" charset="-122"/>
+                <a:cs typeface="IBM Plex Mono" pitchFamily="34" charset="-120"/>
+              </a:rPr>
+              <a:t> </a:t>
+            </a:r>
+            <a:pPr indent="0" marL="0">
+              <a:lnSpc>
+                <a:spcPct val="118000"/>
+              </a:lnSpc>
+              <a:buNone/>
+            </a:pPr>
+            <a:r>
+              <a:rPr lang="en-US" sz="1700" dirty="0">
+                <a:solidFill>
+                  <a:srgbClr val="3F3F46"/>
+                </a:solidFill>
+                <a:latin typeface="IBM Plex Mono" pitchFamily="34" charset="0"/>
+                <a:ea typeface="IBM Plex Mono" pitchFamily="34" charset="-122"/>
+                <a:cs typeface="IBM Plex Mono" pitchFamily="34" charset="-120"/>
+              </a:rPr>
+              <a:t>=</a:t>
+            </a:r>
+            <a:pPr indent="0" marL="0">
+              <a:lnSpc>
+                <a:spcPct val="118000"/>
+              </a:lnSpc>
+              <a:buNone/>
+            </a:pPr>
+            <a:r>
+              <a:rPr lang="en-US" sz="1700" dirty="0">
+                <a:solidFill>
+                  <a:srgbClr val="18181B"/>
+                </a:solidFill>
+                <a:latin typeface="IBM Plex Mono" pitchFamily="34" charset="0"/>
+                <a:ea typeface="IBM Plex Mono" pitchFamily="34" charset="-122"/>
+                <a:cs typeface="IBM Plex Mono" pitchFamily="34" charset="-120"/>
+              </a:rPr>
+              <a:t> </a:t>
+            </a:r>
+            <a:pPr indent="0" marL="0">
+              <a:lnSpc>
+                <a:spcPct val="118000"/>
+              </a:lnSpc>
+              <a:buNone/>
+            </a:pPr>
+            <a:r>
+              <a:rPr lang="en-US" sz="1700" dirty="0">
+                <a:solidFill>
+                  <a:srgbClr val="9A3412"/>
+                </a:solidFill>
+                <a:latin typeface="IBM Plex Mono" pitchFamily="34" charset="0"/>
+                <a:ea typeface="IBM Plex Mono" pitchFamily="34" charset="-122"/>
+                <a:cs typeface="IBM Plex Mono" pitchFamily="34" charset="-120"/>
+              </a:rPr>
+              <a:t>2</a:t>
+            </a:r>
+            <a:pPr indent="0" marL="0">
+              <a:lnSpc>
+                <a:spcPct val="118000"/>
+              </a:lnSpc>
+              <a:buNone/>
+            </a:pPr>
+            <a:r>
+              <a:rPr lang="en-US" sz="1700" dirty="0">
+                <a:solidFill>
+                  <a:srgbClr val="101828"/>
+                </a:solidFill>
+                <a:latin typeface="IBM Plex Sans" pitchFamily="34" charset="0"/>
+                <a:ea typeface="IBM Plex Sans" pitchFamily="34" charset="-122"/>
+                <a:cs typeface="IBM Plex Sans" pitchFamily="34" charset="-120"/>
+              </a:rPr>
+              <a:t>. State the error in it, and write the query out corrected.</a:t>
+            </a:r>
+            <a:endParaRPr lang="en-US" sz="1700" dirty="0"/>
+          </a:p>
+        </p:txBody>
+      </p:sp>
+      <p:sp>
+        <p:nvSpPr>
+          <p:cNvPr id="9" name="Shape 7"/>
+          <p:cNvSpPr/>
+          <p:nvPr/>
+        </p:nvSpPr>
+        <p:spPr>
+          <a:xfrm>
+            <a:off x="10515600" y="2130552"/>
+            <a:ext cx="868680" cy="493776"/>
+          </a:xfrm>
+          <a:prstGeom prst="roundRect">
+            <a:avLst>
+              <a:gd name="adj" fmla="val 18519"/>
+            </a:avLst>
+          </a:prstGeom>
+          <a:solidFill>
+            <a:srgbClr val="EEF2FB"/>
+          </a:solidFill>
+          <a:ln/>
+        </p:spPr>
+      </p:sp>
+      <p:sp>
+        <p:nvSpPr>
+          <p:cNvPr id="10" name="Text 8"/>
+          <p:cNvSpPr txBox="1"/>
+          <p:nvPr/>
+        </p:nvSpPr>
+        <p:spPr>
+          <a:xfrm>
+            <a:off x="10515600" y="2130552"/>
+            <a:ext cx="868680" cy="493776"/>
+          </a:xfrm>
+          <a:prstGeom prst="rect">
+            <a:avLst/>
+          </a:prstGeom>
+          <a:noFill/>
+          <a:ln/>
+        </p:spPr>
+        <p:txBody>
+          <a:bodyPr wrap="square" lIns="0" tIns="0" rIns="0" bIns="0" rtlCol="0" anchor="ctr"/>
+          <a:lstStyle/>
+          <a:p>
+            <a:pPr algn="ctr" indent="0" marL="0">
+              <a:buNone/>
+            </a:pPr>
+            <a:r>
+              <a:rPr lang="en-US" sz="1500" b="1" dirty="0">
+                <a:solidFill>
+                  <a:srgbClr val="2D63FF"/>
+                </a:solidFill>
+                <a:latin typeface="IBM Plex Mono" pitchFamily="34" charset="0"/>
+                <a:ea typeface="IBM Plex Mono" pitchFamily="34" charset="-122"/>
+                <a:cs typeface="IBM Plex Mono" pitchFamily="34" charset="-120"/>
+              </a:rPr>
+              <a:t>[2]</a:t>
+            </a:r>
+            <a:endParaRPr lang="en-US" sz="1500" dirty="0"/>
+          </a:p>
+        </p:txBody>
+      </p:sp>
+      <p:sp>
+        <p:nvSpPr>
+          <p:cNvPr id="11" name="Shape 9"/>
+          <p:cNvSpPr/>
+          <p:nvPr/>
+        </p:nvSpPr>
+        <p:spPr>
+          <a:xfrm>
+            <a:off x="502920" y="3127248"/>
+            <a:ext cx="11155680" cy="1097280"/>
+          </a:xfrm>
+          <a:prstGeom prst="roundRect">
+            <a:avLst>
+              <a:gd name="adj" fmla="val 10000"/>
+            </a:avLst>
+          </a:prstGeom>
+          <a:solidFill>
+            <a:srgbClr val="FFFFFF"/>
+          </a:solidFill>
+          <a:ln w="15875">
+            <a:solidFill>
+              <a:srgbClr val="D9DEE7"/>
+            </a:solidFill>
+            <a:prstDash val="solid"/>
+          </a:ln>
+        </p:spPr>
+      </p:sp>
+      <p:sp>
+        <p:nvSpPr>
+          <p:cNvPr id="12" name="Text 10"/>
+          <p:cNvSpPr txBox="1"/>
+          <p:nvPr/>
+        </p:nvSpPr>
+        <p:spPr>
+          <a:xfrm>
+            <a:off x="914400" y="3236976"/>
+            <a:ext cx="9418320" cy="877824"/>
+          </a:xfrm>
+          <a:prstGeom prst="rect">
+            <a:avLst/>
+          </a:prstGeom>
+          <a:noFill/>
+          <a:ln/>
+        </p:spPr>
+        <p:txBody>
+          <a:bodyPr wrap="square" lIns="0" tIns="0" rIns="0" bIns="0" rtlCol="0" anchor="ctr"/>
+          <a:lstStyle/>
+          <a:p>
+            <a:pPr indent="0" marL="0">
+              <a:lnSpc>
+                <a:spcPct val="118000"/>
+              </a:lnSpc>
+              <a:buNone/>
+            </a:pPr>
+            <a:r>
+              <a:rPr lang="en-US" sz="1700" dirty="0">
+                <a:solidFill>
+                  <a:srgbClr val="101828"/>
+                </a:solidFill>
+                <a:latin typeface="IBM Plex Sans" pitchFamily="34" charset="0"/>
+                <a:ea typeface="IBM Plex Sans" pitchFamily="34" charset="-122"/>
+                <a:cs typeface="IBM Plex Sans" pitchFamily="34" charset="-120"/>
+              </a:rPr>
+              <a:t>A table called Track holds the fields Title, Artist, Seconds and Genre. Write a query that lists the title and artist of every track longer than 240 seconds, longest first.</a:t>
+            </a:r>
+            <a:endParaRPr lang="en-US" sz="1700" dirty="0"/>
+          </a:p>
+        </p:txBody>
+      </p:sp>
+      <p:sp>
+        <p:nvSpPr>
+          <p:cNvPr id="13" name="Shape 11"/>
+          <p:cNvSpPr/>
+          <p:nvPr/>
+        </p:nvSpPr>
+        <p:spPr>
+          <a:xfrm>
+            <a:off x="10515600" y="3429000"/>
+            <a:ext cx="868680" cy="493776"/>
+          </a:xfrm>
+          <a:prstGeom prst="roundRect">
+            <a:avLst>
+              <a:gd name="adj" fmla="val 18519"/>
+            </a:avLst>
+          </a:prstGeom>
+          <a:solidFill>
+            <a:srgbClr val="EEF2FB"/>
+          </a:solidFill>
+          <a:ln/>
+        </p:spPr>
+      </p:sp>
+      <p:sp>
+        <p:nvSpPr>
+          <p:cNvPr id="14" name="Text 12"/>
+          <p:cNvSpPr txBox="1"/>
+          <p:nvPr/>
+        </p:nvSpPr>
+        <p:spPr>
+          <a:xfrm>
+            <a:off x="10515600" y="3429000"/>
+            <a:ext cx="868680" cy="493776"/>
+          </a:xfrm>
+          <a:prstGeom prst="rect">
+            <a:avLst/>
+          </a:prstGeom>
+          <a:noFill/>
+          <a:ln/>
+        </p:spPr>
+        <p:txBody>
+          <a:bodyPr wrap="square" lIns="0" tIns="0" rIns="0" bIns="0" rtlCol="0" anchor="ctr"/>
+          <a:lstStyle/>
+          <a:p>
+            <a:pPr algn="ctr" indent="0" marL="0">
+              <a:buNone/>
+            </a:pPr>
+            <a:r>
+              <a:rPr lang="en-US" sz="1500" b="1" dirty="0">
+                <a:solidFill>
+                  <a:srgbClr val="2D63FF"/>
+                </a:solidFill>
+                <a:latin typeface="IBM Plex Mono" pitchFamily="34" charset="0"/>
+                <a:ea typeface="IBM Plex Mono" pitchFamily="34" charset="-122"/>
+                <a:cs typeface="IBM Plex Mono" pitchFamily="34" charset="-120"/>
+              </a:rPr>
+              <a:t>[4]</a:t>
+            </a:r>
+            <a:endParaRPr lang="en-US" sz="1500" dirty="0"/>
+          </a:p>
+        </p:txBody>
+      </p:sp>
+      <p:sp>
+        <p:nvSpPr>
+          <p:cNvPr id="15" name="Shape 13"/>
+          <p:cNvSpPr/>
+          <p:nvPr/>
+        </p:nvSpPr>
+        <p:spPr>
+          <a:xfrm>
+            <a:off x="502920" y="4425696"/>
+            <a:ext cx="11155680" cy="1097280"/>
+          </a:xfrm>
+          <a:prstGeom prst="roundRect">
+            <a:avLst>
+              <a:gd name="adj" fmla="val 10000"/>
+            </a:avLst>
+          </a:prstGeom>
+          <a:solidFill>
+            <a:srgbClr val="FFFFFF"/>
+          </a:solidFill>
+          <a:ln w="15875">
+            <a:solidFill>
+              <a:srgbClr val="D9DEE7"/>
+            </a:solidFill>
+            <a:prstDash val="solid"/>
+          </a:ln>
+        </p:spPr>
+      </p:sp>
+      <p:sp>
+        <p:nvSpPr>
+          <p:cNvPr id="16" name="Text 14"/>
+          <p:cNvSpPr txBox="1"/>
+          <p:nvPr/>
+        </p:nvSpPr>
+        <p:spPr>
+          <a:xfrm>
+            <a:off x="914400" y="4535424"/>
+            <a:ext cx="9418320" cy="877824"/>
+          </a:xfrm>
+          <a:prstGeom prst="rect">
+            <a:avLst/>
+          </a:prstGeom>
+          <a:noFill/>
+          <a:ln/>
+        </p:spPr>
+        <p:txBody>
+          <a:bodyPr wrap="square" lIns="0" tIns="0" rIns="0" bIns="0" rtlCol="0" anchor="ctr"/>
+          <a:lstStyle/>
+          <a:p>
+            <a:pPr indent="0" marL="0">
+              <a:lnSpc>
+                <a:spcPct val="118000"/>
+              </a:lnSpc>
+              <a:buNone/>
+            </a:pPr>
+            <a:r>
+              <a:rPr lang="en-US" sz="1700" dirty="0">
+                <a:solidFill>
+                  <a:srgbClr val="101828"/>
+                </a:solidFill>
+                <a:latin typeface="IBM Plex Sans" pitchFamily="34" charset="0"/>
+                <a:ea typeface="IBM Plex Sans" pitchFamily="34" charset="-122"/>
+                <a:cs typeface="IBM Plex Sans" pitchFamily="34" charset="-120"/>
+              </a:rPr>
+              <a:t>Using the same Track table, write a query that lists the title of every track that is Jazz or Blues and lasts under 180 seconds.</a:t>
+            </a:r>
+            <a:endParaRPr lang="en-US" sz="1700" dirty="0"/>
+          </a:p>
+        </p:txBody>
+      </p:sp>
+      <p:sp>
+        <p:nvSpPr>
+          <p:cNvPr id="17" name="Shape 15"/>
+          <p:cNvSpPr/>
+          <p:nvPr/>
+        </p:nvSpPr>
+        <p:spPr>
+          <a:xfrm>
+            <a:off x="10515600" y="4727448"/>
+            <a:ext cx="868680" cy="493776"/>
+          </a:xfrm>
+          <a:prstGeom prst="roundRect">
+            <a:avLst>
+              <a:gd name="adj" fmla="val 18519"/>
+            </a:avLst>
+          </a:prstGeom>
+          <a:solidFill>
+            <a:srgbClr val="EEF2FB"/>
+          </a:solidFill>
+          <a:ln/>
+        </p:spPr>
+      </p:sp>
+      <p:sp>
+        <p:nvSpPr>
+          <p:cNvPr id="18" name="Text 16"/>
+          <p:cNvSpPr txBox="1"/>
+          <p:nvPr/>
+        </p:nvSpPr>
+        <p:spPr>
+          <a:xfrm>
+            <a:off x="10515600" y="4727448"/>
+            <a:ext cx="868680" cy="493776"/>
+          </a:xfrm>
+          <a:prstGeom prst="rect">
+            <a:avLst/>
+          </a:prstGeom>
+          <a:noFill/>
+          <a:ln/>
+        </p:spPr>
+        <p:txBody>
+          <a:bodyPr wrap="square" lIns="0" tIns="0" rIns="0" bIns="0" rtlCol="0" anchor="ctr"/>
+          <a:lstStyle/>
+          <a:p>
+            <a:pPr algn="ctr" indent="0" marL="0">
+              <a:buNone/>
+            </a:pPr>
+            <a:r>
+              <a:rPr lang="en-US" sz="1500" b="1" dirty="0">
+                <a:solidFill>
+                  <a:srgbClr val="2D63FF"/>
+                </a:solidFill>
+                <a:latin typeface="IBM Plex Mono" pitchFamily="34" charset="0"/>
+                <a:ea typeface="IBM Plex Mono" pitchFamily="34" charset="-122"/>
+                <a:cs typeface="IBM Plex Mono" pitchFamily="34" charset="-120"/>
+              </a:rPr>
+              <a:t>[4]</a:t>
+            </a:r>
+            <a:endParaRPr lang="en-US" sz="1500" dirty="0"/>
+          </a:p>
+        </p:txBody>
+      </p:sp>
+    </p:spTree>
+  </p:cSld>
+  <p:clrMapOvr>
+    <a:masterClrMapping/>
+  </p:clrMapOvr>
+</p:sld>
+</file>
+
+<file path=ppt/slides/slide15.xml><?xml version="1.0" encoding="utf-8"?>
+<p:sld xmlns:a="http://schemas.openxmlformats.org/drawingml/2006/main" xmlns:r="http://schemas.openxmlformats.org/officeDocument/2006/relationships" xmlns:p="http://schemas.openxmlformats.org/presentationml/2006/main">
+  <p:cSld name="Slide 15">
     <p:bg>
       <p:bgPr>
         <a:solidFill>
